--- a/AI周报模板.pptx
+++ b/AI周报模板.pptx
@@ -5,25 +5,28 @@
     <p:sldMasterId id="2147483660" r:id="rId1"/>
   </p:sldMasterIdLst>
   <p:notesMasterIdLst>
-    <p:notesMasterId r:id="rId13"/>
+    <p:notesMasterId r:id="rId16"/>
   </p:notesMasterIdLst>
   <p:sldIdLst>
     <p:sldId id="141170882" r:id="rId2"/>
     <p:sldId id="141171110" r:id="rId3"/>
     <p:sldId id="141171117" r:id="rId4"/>
     <p:sldId id="141171118" r:id="rId5"/>
-    <p:sldId id="141171119" r:id="rId6"/>
-    <p:sldId id="141171120" r:id="rId7"/>
-    <p:sldId id="141171121" r:id="rId8"/>
-    <p:sldId id="141171122" r:id="rId9"/>
-    <p:sldId id="141171123" r:id="rId10"/>
-    <p:sldId id="141171124" r:id="rId11"/>
-    <p:sldId id="141170155" r:id="rId12"/>
+    <p:sldId id="141171125" r:id="rId6"/>
+    <p:sldId id="141171119" r:id="rId7"/>
+    <p:sldId id="141171120" r:id="rId8"/>
+    <p:sldId id="141171121" r:id="rId9"/>
+    <p:sldId id="141171126" r:id="rId10"/>
+    <p:sldId id="141171122" r:id="rId11"/>
+    <p:sldId id="141171123" r:id="rId12"/>
+    <p:sldId id="141171124" r:id="rId13"/>
+    <p:sldId id="141171127" r:id="rId14"/>
+    <p:sldId id="141170155" r:id="rId15"/>
   </p:sldIdLst>
   <p:sldSz cx="12192000" cy="6858000"/>
   <p:notesSz cx="6858000" cy="9144000"/>
   <p:custDataLst>
-    <p:tags r:id="rId14"/>
+    <p:tags r:id="rId17"/>
   </p:custDataLst>
   <p:defaultTextStyle>
     <a:defPPr>
@@ -686,7 +689,7 @@
           <a:p>
             <a:fld id="{3A44B73B-264F-4B2D-A723-A6258E4164EA}" type="slidenum">
               <a:rPr lang="zh-CN" altLang="en-US" smtClean="0"/>
-              <a:t>11</a:t>
+              <a:t>14</a:t>
             </a:fld>
             <a:endParaRPr lang="zh-CN" altLang="en-US"/>
           </a:p>
@@ -3037,7 +3040,7 @@
         <p:cNvPr id="1" name="">
           <a:extLst>
             <a:ext uri="{FF2B5EF4-FFF2-40B4-BE49-F238E27FC236}">
-              <a16:creationId xmlns:a16="http://schemas.microsoft.com/office/drawing/2014/main" id="{C37AE0FA-F881-FF1D-535F-E6EAFF82990B}"/>
+              <a16:creationId xmlns:a16="http://schemas.microsoft.com/office/drawing/2014/main" id="{B5B4EEC0-36D2-4F96-1789-35A309D947CA}"/>
             </a:ext>
           </a:extLst>
         </p:cNvPr>
@@ -3057,7 +3060,515 @@
           <p:cNvPr id="5" name="对象 4" hidden="1">
             <a:extLst>
               <a:ext uri="{FF2B5EF4-FFF2-40B4-BE49-F238E27FC236}">
-                <a16:creationId xmlns:a16="http://schemas.microsoft.com/office/drawing/2014/main" id="{C452E764-AD08-504B-6560-47D0970D0625}"/>
+                <a16:creationId xmlns:a16="http://schemas.microsoft.com/office/drawing/2014/main" id="{8234209E-E7C6-79CC-CE17-26B6D9A95CAE}"/>
+              </a:ext>
+            </a:extLst>
+          </p:cNvPr>
+          <p:cNvGraphicFramePr>
+            <a:graphicFrameLocks noChangeAspect="1"/>
+          </p:cNvGraphicFramePr>
+          <p:nvPr>
+            <p:custDataLst>
+              <p:tags r:id="rId1"/>
+            </p:custDataLst>
+          </p:nvPr>
+        </p:nvGraphicFramePr>
+        <p:xfrm>
+          <a:off x="1588" y="1588"/>
+          <a:ext cx="1588" cy="1588"/>
+        </p:xfrm>
+        <a:graphic>
+          <a:graphicData uri="http://schemas.openxmlformats.org/presentationml/2006/ole">
+            <mc:AlternateContent xmlns:mc="http://schemas.openxmlformats.org/markup-compatibility/2006">
+              <mc:Choice xmlns:v="urn:schemas-microsoft-com:vml" Requires="v">
+                <p:oleObj name="think-cell 幻灯片" r:id="rId3" imgW="425" imgH="426" progId="TCLayout.ActiveDocument.1">
+                  <p:embed/>
+                </p:oleObj>
+              </mc:Choice>
+              <mc:Fallback>
+                <p:oleObj name="think-cell 幻灯片" r:id="rId3" imgW="425" imgH="426" progId="TCLayout.ActiveDocument.1">
+                  <p:embed/>
+                  <p:pic>
+                    <p:nvPicPr>
+                      <p:cNvPr id="5" name="对象 4" hidden="1">
+                        <a:extLst>
+                          <a:ext uri="{FF2B5EF4-FFF2-40B4-BE49-F238E27FC236}">
+                            <a16:creationId xmlns:a16="http://schemas.microsoft.com/office/drawing/2014/main" id="{F6D6C291-5179-D1C6-51F3-2F0EC23B3FBF}"/>
+                          </a:ext>
+                        </a:extLst>
+                      </p:cNvPr>
+                      <p:cNvPicPr/>
+                      <p:nvPr/>
+                    </p:nvPicPr>
+                    <p:blipFill>
+                      <a:blip r:embed="rId4"/>
+                      <a:stretch>
+                        <a:fillRect/>
+                      </a:stretch>
+                    </p:blipFill>
+                    <p:spPr>
+                      <a:xfrm>
+                        <a:off x="1588" y="1588"/>
+                        <a:ext cx="1588" cy="1588"/>
+                      </a:xfrm>
+                      <a:prstGeom prst="rect">
+                        <a:avLst/>
+                      </a:prstGeom>
+                    </p:spPr>
+                  </p:pic>
+                </p:oleObj>
+              </mc:Fallback>
+            </mc:AlternateContent>
+          </a:graphicData>
+        </a:graphic>
+      </p:graphicFrame>
+      <p:sp>
+        <p:nvSpPr>
+          <p:cNvPr id="2" name="标题 1">
+            <a:extLst>
+              <a:ext uri="{FF2B5EF4-FFF2-40B4-BE49-F238E27FC236}">
+                <a16:creationId xmlns:a16="http://schemas.microsoft.com/office/drawing/2014/main" id="{11D8C07E-A3BD-C6DA-26FE-3FF2DB122CD6}"/>
+              </a:ext>
+            </a:extLst>
+          </p:cNvPr>
+          <p:cNvSpPr>
+            <a:spLocks noGrp="1"/>
+          </p:cNvSpPr>
+          <p:nvPr>
+            <p:ph type="title"/>
+          </p:nvPr>
+        </p:nvSpPr>
+        <p:spPr>
+          <a:xfrm>
+            <a:off x="378371" y="237181"/>
+            <a:ext cx="11254155" cy="463846"/>
+          </a:xfrm>
+        </p:spPr>
+        <p:txBody>
+          <a:bodyPr vert="horz"/>
+          <a:lstStyle/>
+          <a:p>
+            <a:r>
+              <a:rPr lang="en-US" altLang="zh-CN" dirty="0"/>
+              <a:t>【</a:t>
+            </a:r>
+            <a:r>
+              <a:rPr lang="zh-CN" altLang="en-US" dirty="0"/>
+              <a:t>本周关注</a:t>
+            </a:r>
+            <a:r>
+              <a:rPr lang="en-US" altLang="zh-CN" dirty="0"/>
+              <a:t>】</a:t>
+            </a:r>
+            <a:r>
+              <a:rPr lang="zh-CN" altLang="en-US" dirty="0"/>
+              <a:t>厂商</a:t>
+            </a:r>
+            <a:r>
+              <a:rPr lang="en-US" altLang="zh-CN" dirty="0"/>
+              <a:t>&amp;</a:t>
+            </a:r>
+            <a:r>
+              <a:rPr lang="zh-CN" altLang="en-US" dirty="0"/>
+              <a:t>投融资动态</a:t>
+            </a:r>
+          </a:p>
+        </p:txBody>
+      </p:sp>
+      <p:sp>
+        <p:nvSpPr>
+          <p:cNvPr id="3" name="文本占位符 2">
+            <a:extLst>
+              <a:ext uri="{FF2B5EF4-FFF2-40B4-BE49-F238E27FC236}">
+                <a16:creationId xmlns:a16="http://schemas.microsoft.com/office/drawing/2014/main" id="{98491B4B-A37B-9B21-B6E6-69800FF58E2C}"/>
+              </a:ext>
+            </a:extLst>
+          </p:cNvPr>
+          <p:cNvSpPr>
+            <a:spLocks noGrp="1"/>
+          </p:cNvSpPr>
+          <p:nvPr>
+            <p:ph type="body" sz="quarter" idx="10"/>
+          </p:nvPr>
+        </p:nvSpPr>
+        <p:spPr/>
+        <p:txBody>
+          <a:bodyPr/>
+          <a:lstStyle/>
+          <a:p>
+            <a:endParaRPr lang="zh-CN" altLang="en-US" dirty="0"/>
+          </a:p>
+        </p:txBody>
+      </p:sp>
+      <p:sp>
+        <p:nvSpPr>
+          <p:cNvPr id="4" name="文本占位符 3">
+            <a:extLst>
+              <a:ext uri="{FF2B5EF4-FFF2-40B4-BE49-F238E27FC236}">
+                <a16:creationId xmlns:a16="http://schemas.microsoft.com/office/drawing/2014/main" id="{88F93859-38DA-64AF-E13D-30A7A6CC47E7}"/>
+              </a:ext>
+            </a:extLst>
+          </p:cNvPr>
+          <p:cNvSpPr>
+            <a:spLocks noGrp="1"/>
+          </p:cNvSpPr>
+          <p:nvPr>
+            <p:ph type="body" sz="quarter" idx="11"/>
+          </p:nvPr>
+        </p:nvSpPr>
+        <p:spPr/>
+        <p:txBody>
+          <a:bodyPr/>
+          <a:lstStyle/>
+          <a:p>
+            <a:endParaRPr lang="zh-CN" altLang="en-US" dirty="0"/>
+          </a:p>
+        </p:txBody>
+      </p:sp>
+      <p:sp>
+        <p:nvSpPr>
+          <p:cNvPr id="12" name="矩形 11">
+            <a:extLst>
+              <a:ext uri="{FF2B5EF4-FFF2-40B4-BE49-F238E27FC236}">
+                <a16:creationId xmlns:a16="http://schemas.microsoft.com/office/drawing/2014/main" id="{4580790C-D227-417A-B10F-738EAA74EFFE}"/>
+              </a:ext>
+            </a:extLst>
+          </p:cNvPr>
+          <p:cNvSpPr/>
+          <p:nvPr/>
+        </p:nvSpPr>
+        <p:spPr>
+          <a:xfrm>
+            <a:off x="547300" y="3793422"/>
+            <a:ext cx="8250192" cy="2453584"/>
+          </a:xfrm>
+          <a:prstGeom prst="rect">
+            <a:avLst/>
+          </a:prstGeom>
+          <a:solidFill>
+            <a:schemeClr val="bg1">
+              <a:lumMod val="95000"/>
+            </a:schemeClr>
+          </a:solidFill>
+          <a:ln>
+            <a:noFill/>
+          </a:ln>
+        </p:spPr>
+        <p:style>
+          <a:lnRef idx="2">
+            <a:schemeClr val="accent1">
+              <a:shade val="50000"/>
+            </a:schemeClr>
+          </a:lnRef>
+          <a:fillRef idx="1">
+            <a:schemeClr val="accent1"/>
+          </a:fillRef>
+          <a:effectRef idx="0">
+            <a:schemeClr val="accent1"/>
+          </a:effectRef>
+          <a:fontRef idx="minor">
+            <a:schemeClr val="lt1"/>
+          </a:fontRef>
+        </p:style>
+        <p:txBody>
+          <a:bodyPr rtlCol="0" anchor="ctr"/>
+          <a:lstStyle/>
+          <a:p>
+            <a:pPr marL="285750" indent="-285750">
+              <a:buFont typeface="Arial" panose="020B0604020202020204" pitchFamily="34" charset="0"/>
+              <a:buChar char="•"/>
+            </a:pPr>
+            <a:r>
+              <a:rPr kumimoji="1" lang="zh-CN" altLang="en-US" sz="1400" b="1" dirty="0">
+                <a:solidFill>
+                  <a:prstClr val="black"/>
+                </a:solidFill>
+                <a:latin typeface="华文楷体" panose="02010600040101010101" pitchFamily="2" charset="-122"/>
+                <a:ea typeface="华文楷体" panose="02010600040101010101" pitchFamily="2" charset="-122"/>
+              </a:rPr>
+              <a:t>新闻</a:t>
+            </a:r>
+            <a:r>
+              <a:rPr kumimoji="1" lang="zh-CN" altLang="en" sz="1400" b="1" dirty="0">
+                <a:solidFill>
+                  <a:prstClr val="black"/>
+                </a:solidFill>
+                <a:latin typeface="华文楷体" panose="02010600040101010101" pitchFamily="2" charset="-122"/>
+                <a:ea typeface="华文楷体" panose="02010600040101010101" pitchFamily="2" charset="-122"/>
+              </a:rPr>
+              <a:t>：</a:t>
+            </a:r>
+            <a:r>
+              <a:rPr kumimoji="1" lang="zh-CN" altLang="en-US" sz="1400" dirty="0">
+                <a:solidFill>
+                  <a:prstClr val="black"/>
+                </a:solidFill>
+                <a:latin typeface="华文楷体" panose="02010600040101010101" pitchFamily="2" charset="-122"/>
+                <a:ea typeface="华文楷体" panose="02010600040101010101" pitchFamily="2" charset="-122"/>
+              </a:rPr>
+              <a:t>正文</a:t>
+            </a:r>
+            <a:endParaRPr lang="zh-CN" altLang="en-US" sz="1400" dirty="0"/>
+          </a:p>
+          <a:p>
+            <a:pPr algn="l">
+              <a:lnSpc>
+                <a:spcPct val="130000"/>
+              </a:lnSpc>
+              <a:spcBef>
+                <a:spcPts val="0"/>
+              </a:spcBef>
+              <a:spcAft>
+                <a:spcPts val="0"/>
+              </a:spcAft>
+            </a:pPr>
+            <a:endParaRPr lang="zh-CN" altLang="en-US" sz="1400" dirty="0">
+              <a:effectLst/>
+            </a:endParaRPr>
+          </a:p>
+        </p:txBody>
+      </p:sp>
+      <p:sp>
+        <p:nvSpPr>
+          <p:cNvPr id="20" name="矩形 19">
+            <a:extLst>
+              <a:ext uri="{FF2B5EF4-FFF2-40B4-BE49-F238E27FC236}">
+                <a16:creationId xmlns:a16="http://schemas.microsoft.com/office/drawing/2014/main" id="{DB9AD8D5-9456-E566-6A22-CDF38AD8393A}"/>
+              </a:ext>
+            </a:extLst>
+          </p:cNvPr>
+          <p:cNvSpPr/>
+          <p:nvPr/>
+        </p:nvSpPr>
+        <p:spPr>
+          <a:xfrm>
+            <a:off x="547300" y="1017577"/>
+            <a:ext cx="8250192" cy="2569691"/>
+          </a:xfrm>
+          <a:prstGeom prst="rect">
+            <a:avLst/>
+          </a:prstGeom>
+          <a:solidFill>
+            <a:schemeClr val="bg1">
+              <a:lumMod val="95000"/>
+            </a:schemeClr>
+          </a:solidFill>
+          <a:ln>
+            <a:noFill/>
+          </a:ln>
+        </p:spPr>
+        <p:style>
+          <a:lnRef idx="2">
+            <a:schemeClr val="accent1">
+              <a:shade val="50000"/>
+            </a:schemeClr>
+          </a:lnRef>
+          <a:fillRef idx="1">
+            <a:schemeClr val="accent1"/>
+          </a:fillRef>
+          <a:effectRef idx="0">
+            <a:schemeClr val="accent1"/>
+          </a:effectRef>
+          <a:fontRef idx="minor">
+            <a:schemeClr val="lt1"/>
+          </a:fontRef>
+        </p:style>
+        <p:txBody>
+          <a:bodyPr rtlCol="0" anchor="ctr"/>
+          <a:lstStyle/>
+          <a:p>
+            <a:pPr marL="285750" indent="-285750" algn="l">
+              <a:lnSpc>
+                <a:spcPct val="130000"/>
+              </a:lnSpc>
+              <a:spcBef>
+                <a:spcPts val="0"/>
+              </a:spcBef>
+              <a:spcAft>
+                <a:spcPts val="0"/>
+              </a:spcAft>
+              <a:buFont typeface="Arial" panose="020B0604020202020204" pitchFamily="34" charset="0"/>
+              <a:buChar char="•"/>
+            </a:pPr>
+            <a:r>
+              <a:rPr kumimoji="1" lang="zh-CN" altLang="en-US" sz="1400" b="1" dirty="0">
+                <a:solidFill>
+                  <a:prstClr val="black"/>
+                </a:solidFill>
+                <a:latin typeface="华文楷体" panose="02010600040101010101" pitchFamily="2" charset="-122"/>
+                <a:ea typeface="华文楷体" panose="02010600040101010101" pitchFamily="2" charset="-122"/>
+              </a:rPr>
+              <a:t>新闻</a:t>
+            </a:r>
+            <a:r>
+              <a:rPr kumimoji="1" lang="zh-CN" altLang="en" sz="1400" b="1" dirty="0">
+                <a:solidFill>
+                  <a:prstClr val="black"/>
+                </a:solidFill>
+                <a:latin typeface="华文楷体" panose="02010600040101010101" pitchFamily="2" charset="-122"/>
+                <a:ea typeface="华文楷体" panose="02010600040101010101" pitchFamily="2" charset="-122"/>
+              </a:rPr>
+              <a:t>：</a:t>
+            </a:r>
+            <a:r>
+              <a:rPr kumimoji="1" lang="zh-CN" altLang="en-US" sz="1400" dirty="0">
+                <a:solidFill>
+                  <a:prstClr val="black"/>
+                </a:solidFill>
+                <a:latin typeface="华文楷体" panose="02010600040101010101" pitchFamily="2" charset="-122"/>
+                <a:ea typeface="华文楷体" panose="02010600040101010101" pitchFamily="2" charset="-122"/>
+              </a:rPr>
+              <a:t>正文</a:t>
+            </a:r>
+          </a:p>
+        </p:txBody>
+      </p:sp>
+      <p:sp>
+        <p:nvSpPr>
+          <p:cNvPr id="6" name="矩形 5">
+            <a:extLst>
+              <a:ext uri="{FF2B5EF4-FFF2-40B4-BE49-F238E27FC236}">
+                <a16:creationId xmlns:a16="http://schemas.microsoft.com/office/drawing/2014/main" id="{3014B504-4363-F787-A68C-C0C95AD2025B}"/>
+              </a:ext>
+            </a:extLst>
+          </p:cNvPr>
+          <p:cNvSpPr/>
+          <p:nvPr/>
+        </p:nvSpPr>
+        <p:spPr>
+          <a:xfrm>
+            <a:off x="9044609" y="1017577"/>
+            <a:ext cx="2703443" cy="2569691"/>
+          </a:xfrm>
+          <a:prstGeom prst="rect">
+            <a:avLst/>
+          </a:prstGeom>
+        </p:spPr>
+        <p:style>
+          <a:lnRef idx="2">
+            <a:schemeClr val="accent1">
+              <a:shade val="50000"/>
+            </a:schemeClr>
+          </a:lnRef>
+          <a:fillRef idx="1">
+            <a:schemeClr val="accent1"/>
+          </a:fillRef>
+          <a:effectRef idx="0">
+            <a:schemeClr val="accent1"/>
+          </a:effectRef>
+          <a:fontRef idx="minor">
+            <a:schemeClr val="lt1"/>
+          </a:fontRef>
+        </p:style>
+        <p:txBody>
+          <a:bodyPr rtlCol="0" anchor="ctr"/>
+          <a:lstStyle/>
+          <a:p>
+            <a:pPr algn="ctr"/>
+            <a:r>
+              <a:rPr kumimoji="1" lang="zh-CN" altLang="en-US" sz="1400" dirty="0">
+                <a:latin typeface="华文楷体" panose="02010600040101010101" pitchFamily="2" charset="-122"/>
+                <a:ea typeface="华文楷体" panose="02010600040101010101" pitchFamily="2" charset="-122"/>
+              </a:rPr>
+              <a:t>图片占位符</a:t>
+            </a:r>
+          </a:p>
+        </p:txBody>
+      </p:sp>
+      <p:sp>
+        <p:nvSpPr>
+          <p:cNvPr id="7" name="矩形 6">
+            <a:extLst>
+              <a:ext uri="{FF2B5EF4-FFF2-40B4-BE49-F238E27FC236}">
+                <a16:creationId xmlns:a16="http://schemas.microsoft.com/office/drawing/2014/main" id="{49EE3BF0-551F-08B8-05BE-B23438242D6B}"/>
+              </a:ext>
+            </a:extLst>
+          </p:cNvPr>
+          <p:cNvSpPr/>
+          <p:nvPr/>
+        </p:nvSpPr>
+        <p:spPr>
+          <a:xfrm>
+            <a:off x="9044609" y="3793422"/>
+            <a:ext cx="2703443" cy="2453583"/>
+          </a:xfrm>
+          <a:prstGeom prst="rect">
+            <a:avLst/>
+          </a:prstGeom>
+        </p:spPr>
+        <p:style>
+          <a:lnRef idx="2">
+            <a:schemeClr val="accent1">
+              <a:shade val="50000"/>
+            </a:schemeClr>
+          </a:lnRef>
+          <a:fillRef idx="1">
+            <a:schemeClr val="accent1"/>
+          </a:fillRef>
+          <a:effectRef idx="0">
+            <a:schemeClr val="accent1"/>
+          </a:effectRef>
+          <a:fontRef idx="minor">
+            <a:schemeClr val="lt1"/>
+          </a:fontRef>
+        </p:style>
+        <p:txBody>
+          <a:bodyPr rtlCol="0" anchor="ctr"/>
+          <a:lstStyle/>
+          <a:p>
+            <a:pPr algn="ctr"/>
+            <a:r>
+              <a:rPr kumimoji="1" lang="zh-CN" altLang="en-US" sz="1400" dirty="0">
+                <a:latin typeface="华文楷体" panose="02010600040101010101" pitchFamily="2" charset="-122"/>
+                <a:ea typeface="华文楷体" panose="02010600040101010101" pitchFamily="2" charset="-122"/>
+              </a:rPr>
+              <a:t>图片占位符</a:t>
+            </a:r>
+          </a:p>
+        </p:txBody>
+      </p:sp>
+    </p:spTree>
+    <p:extLst>
+      <p:ext uri="{BB962C8B-B14F-4D97-AF65-F5344CB8AC3E}">
+        <p14:creationId xmlns:p14="http://schemas.microsoft.com/office/powerpoint/2010/main" val="1426254220"/>
+      </p:ext>
+    </p:extLst>
+  </p:cSld>
+  <p:clrMapOvr>
+    <a:masterClrMapping/>
+  </p:clrMapOvr>
+</p:sld>
+</file>
+
+<file path=ppt/slides/slide11.xml><?xml version="1.0" encoding="utf-8"?>
+<p:sld xmlns:a="http://schemas.openxmlformats.org/drawingml/2006/main" xmlns:r="http://schemas.openxmlformats.org/officeDocument/2006/relationships" xmlns:p="http://schemas.openxmlformats.org/presentationml/2006/main">
+  <p:cSld>
+    <p:spTree>
+      <p:nvGrpSpPr>
+        <p:cNvPr id="1" name="">
+          <a:extLst>
+            <a:ext uri="{FF2B5EF4-FFF2-40B4-BE49-F238E27FC236}">
+              <a16:creationId xmlns:a16="http://schemas.microsoft.com/office/drawing/2014/main" id="{9D458671-E763-115B-C46E-82986CC11E7D}"/>
+            </a:ext>
+          </a:extLst>
+        </p:cNvPr>
+        <p:cNvGrpSpPr/>
+        <p:nvPr/>
+      </p:nvGrpSpPr>
+      <p:grpSpPr>
+        <a:xfrm>
+          <a:off x="0" y="0"/>
+          <a:ext cx="0" cy="0"/>
+          <a:chOff x="0" y="0"/>
+          <a:chExt cx="0" cy="0"/>
+        </a:xfrm>
+      </p:grpSpPr>
+      <p:graphicFrame>
+        <p:nvGraphicFramePr>
+          <p:cNvPr id="5" name="对象 4" hidden="1">
+            <a:extLst>
+              <a:ext uri="{FF2B5EF4-FFF2-40B4-BE49-F238E27FC236}">
+                <a16:creationId xmlns:a16="http://schemas.microsoft.com/office/drawing/2014/main" id="{B56D40AC-6D58-0523-445B-E1B027761AC4}"/>
               </a:ext>
             </a:extLst>
           </p:cNvPr>
@@ -3124,7 +3635,7 @@
           <p:cNvPr id="2" name="标题 1">
             <a:extLst>
               <a:ext uri="{FF2B5EF4-FFF2-40B4-BE49-F238E27FC236}">
-                <a16:creationId xmlns:a16="http://schemas.microsoft.com/office/drawing/2014/main" id="{8BC45E94-F80B-E078-3930-B89ABCB39B61}"/>
+                <a16:creationId xmlns:a16="http://schemas.microsoft.com/office/drawing/2014/main" id="{FDBDD6D3-B4E3-9677-A51C-372E24C8595C}"/>
               </a:ext>
             </a:extLst>
           </p:cNvPr>
@@ -3177,7 +3688,7 @@
           <p:cNvPr id="3" name="文本占位符 2">
             <a:extLst>
               <a:ext uri="{FF2B5EF4-FFF2-40B4-BE49-F238E27FC236}">
-                <a16:creationId xmlns:a16="http://schemas.microsoft.com/office/drawing/2014/main" id="{6C027100-0C65-8C50-3FE6-405C0E4002EC}"/>
+                <a16:creationId xmlns:a16="http://schemas.microsoft.com/office/drawing/2014/main" id="{5BE0C64C-B8CD-16AF-0C9E-7B2BD9DDD416}"/>
               </a:ext>
             </a:extLst>
           </p:cNvPr>
@@ -3202,7 +3713,7 @@
           <p:cNvPr id="4" name="文本占位符 3">
             <a:extLst>
               <a:ext uri="{FF2B5EF4-FFF2-40B4-BE49-F238E27FC236}">
-                <a16:creationId xmlns:a16="http://schemas.microsoft.com/office/drawing/2014/main" id="{C48105A9-D22D-EECD-12B0-549C40CDCA54}"/>
+                <a16:creationId xmlns:a16="http://schemas.microsoft.com/office/drawing/2014/main" id="{BB8D29E4-1373-DDC9-1B8A-21E4BEA089E1}"/>
               </a:ext>
             </a:extLst>
           </p:cNvPr>
@@ -3227,7 +3738,7 @@
           <p:cNvPr id="12" name="矩形 11">
             <a:extLst>
               <a:ext uri="{FF2B5EF4-FFF2-40B4-BE49-F238E27FC236}">
-                <a16:creationId xmlns:a16="http://schemas.microsoft.com/office/drawing/2014/main" id="{FB7BDA76-9C39-93A3-BE43-61B86192F73D}"/>
+                <a16:creationId xmlns:a16="http://schemas.microsoft.com/office/drawing/2014/main" id="{35A6BA6E-BDAD-F27A-076B-244EC5F73ECA}"/>
               </a:ext>
             </a:extLst>
           </p:cNvPr>
@@ -3330,7 +3841,7 @@
           <p:cNvPr id="20" name="矩形 19">
             <a:extLst>
               <a:ext uri="{FF2B5EF4-FFF2-40B4-BE49-F238E27FC236}">
-                <a16:creationId xmlns:a16="http://schemas.microsoft.com/office/drawing/2014/main" id="{590CD911-4F0B-D723-D914-688DB5A851AE}"/>
+                <a16:creationId xmlns:a16="http://schemas.microsoft.com/office/drawing/2014/main" id="{2D89FBA6-BC2B-8918-7700-AC83EE18730F}"/>
               </a:ext>
             </a:extLst>
           </p:cNvPr>
@@ -3422,6 +3933,514 @@
       </p:sp>
       <p:sp>
         <p:nvSpPr>
+          <p:cNvPr id="6" name="矩形 5">
+            <a:extLst>
+              <a:ext uri="{FF2B5EF4-FFF2-40B4-BE49-F238E27FC236}">
+                <a16:creationId xmlns:a16="http://schemas.microsoft.com/office/drawing/2014/main" id="{569C32D5-EB20-8FE2-6C96-43BC49330FCE}"/>
+              </a:ext>
+            </a:extLst>
+          </p:cNvPr>
+          <p:cNvSpPr/>
+          <p:nvPr/>
+        </p:nvSpPr>
+        <p:spPr>
+          <a:xfrm>
+            <a:off x="9044609" y="1017577"/>
+            <a:ext cx="2703443" cy="2569691"/>
+          </a:xfrm>
+          <a:prstGeom prst="rect">
+            <a:avLst/>
+          </a:prstGeom>
+        </p:spPr>
+        <p:style>
+          <a:lnRef idx="2">
+            <a:schemeClr val="accent1">
+              <a:shade val="50000"/>
+            </a:schemeClr>
+          </a:lnRef>
+          <a:fillRef idx="1">
+            <a:schemeClr val="accent1"/>
+          </a:fillRef>
+          <a:effectRef idx="0">
+            <a:schemeClr val="accent1"/>
+          </a:effectRef>
+          <a:fontRef idx="minor">
+            <a:schemeClr val="lt1"/>
+          </a:fontRef>
+        </p:style>
+        <p:txBody>
+          <a:bodyPr rtlCol="0" anchor="ctr"/>
+          <a:lstStyle/>
+          <a:p>
+            <a:pPr algn="ctr"/>
+            <a:r>
+              <a:rPr kumimoji="1" lang="zh-CN" altLang="en-US" sz="1400" dirty="0">
+                <a:latin typeface="华文楷体" panose="02010600040101010101" pitchFamily="2" charset="-122"/>
+                <a:ea typeface="华文楷体" panose="02010600040101010101" pitchFamily="2" charset="-122"/>
+              </a:rPr>
+              <a:t>图片占位符</a:t>
+            </a:r>
+          </a:p>
+        </p:txBody>
+      </p:sp>
+      <p:sp>
+        <p:nvSpPr>
+          <p:cNvPr id="7" name="矩形 6">
+            <a:extLst>
+              <a:ext uri="{FF2B5EF4-FFF2-40B4-BE49-F238E27FC236}">
+                <a16:creationId xmlns:a16="http://schemas.microsoft.com/office/drawing/2014/main" id="{3BE37191-BA62-46D6-0F2E-1C212D32AE6C}"/>
+              </a:ext>
+            </a:extLst>
+          </p:cNvPr>
+          <p:cNvSpPr/>
+          <p:nvPr/>
+        </p:nvSpPr>
+        <p:spPr>
+          <a:xfrm>
+            <a:off x="9044609" y="3793422"/>
+            <a:ext cx="2703443" cy="2453583"/>
+          </a:xfrm>
+          <a:prstGeom prst="rect">
+            <a:avLst/>
+          </a:prstGeom>
+        </p:spPr>
+        <p:style>
+          <a:lnRef idx="2">
+            <a:schemeClr val="accent1">
+              <a:shade val="50000"/>
+            </a:schemeClr>
+          </a:lnRef>
+          <a:fillRef idx="1">
+            <a:schemeClr val="accent1"/>
+          </a:fillRef>
+          <a:effectRef idx="0">
+            <a:schemeClr val="accent1"/>
+          </a:effectRef>
+          <a:fontRef idx="minor">
+            <a:schemeClr val="lt1"/>
+          </a:fontRef>
+        </p:style>
+        <p:txBody>
+          <a:bodyPr rtlCol="0" anchor="ctr"/>
+          <a:lstStyle/>
+          <a:p>
+            <a:pPr algn="ctr"/>
+            <a:r>
+              <a:rPr kumimoji="1" lang="zh-CN" altLang="en-US" sz="1400" dirty="0">
+                <a:latin typeface="华文楷体" panose="02010600040101010101" pitchFamily="2" charset="-122"/>
+                <a:ea typeface="华文楷体" panose="02010600040101010101" pitchFamily="2" charset="-122"/>
+              </a:rPr>
+              <a:t>图片占位符</a:t>
+            </a:r>
+          </a:p>
+        </p:txBody>
+      </p:sp>
+    </p:spTree>
+    <p:extLst>
+      <p:ext uri="{BB962C8B-B14F-4D97-AF65-F5344CB8AC3E}">
+        <p14:creationId xmlns:p14="http://schemas.microsoft.com/office/powerpoint/2010/main" val="2217065166"/>
+      </p:ext>
+    </p:extLst>
+  </p:cSld>
+  <p:clrMapOvr>
+    <a:masterClrMapping/>
+  </p:clrMapOvr>
+</p:sld>
+</file>
+
+<file path=ppt/slides/slide12.xml><?xml version="1.0" encoding="utf-8"?>
+<p:sld xmlns:a="http://schemas.openxmlformats.org/drawingml/2006/main" xmlns:r="http://schemas.openxmlformats.org/officeDocument/2006/relationships" xmlns:p="http://schemas.openxmlformats.org/presentationml/2006/main">
+  <p:cSld>
+    <p:spTree>
+      <p:nvGrpSpPr>
+        <p:cNvPr id="1" name="">
+          <a:extLst>
+            <a:ext uri="{FF2B5EF4-FFF2-40B4-BE49-F238E27FC236}">
+              <a16:creationId xmlns:a16="http://schemas.microsoft.com/office/drawing/2014/main" id="{C37AE0FA-F881-FF1D-535F-E6EAFF82990B}"/>
+            </a:ext>
+          </a:extLst>
+        </p:cNvPr>
+        <p:cNvGrpSpPr/>
+        <p:nvPr/>
+      </p:nvGrpSpPr>
+      <p:grpSpPr>
+        <a:xfrm>
+          <a:off x="0" y="0"/>
+          <a:ext cx="0" cy="0"/>
+          <a:chOff x="0" y="0"/>
+          <a:chExt cx="0" cy="0"/>
+        </a:xfrm>
+      </p:grpSpPr>
+      <p:graphicFrame>
+        <p:nvGraphicFramePr>
+          <p:cNvPr id="5" name="对象 4" hidden="1">
+            <a:extLst>
+              <a:ext uri="{FF2B5EF4-FFF2-40B4-BE49-F238E27FC236}">
+                <a16:creationId xmlns:a16="http://schemas.microsoft.com/office/drawing/2014/main" id="{C452E764-AD08-504B-6560-47D0970D0625}"/>
+              </a:ext>
+            </a:extLst>
+          </p:cNvPr>
+          <p:cNvGraphicFramePr>
+            <a:graphicFrameLocks noChangeAspect="1"/>
+          </p:cNvGraphicFramePr>
+          <p:nvPr>
+            <p:custDataLst>
+              <p:tags r:id="rId1"/>
+            </p:custDataLst>
+          </p:nvPr>
+        </p:nvGraphicFramePr>
+        <p:xfrm>
+          <a:off x="1588" y="1588"/>
+          <a:ext cx="1588" cy="1588"/>
+        </p:xfrm>
+        <a:graphic>
+          <a:graphicData uri="http://schemas.openxmlformats.org/presentationml/2006/ole">
+            <mc:AlternateContent xmlns:mc="http://schemas.openxmlformats.org/markup-compatibility/2006">
+              <mc:Choice xmlns:v="urn:schemas-microsoft-com:vml" Requires="v">
+                <p:oleObj name="think-cell 幻灯片" r:id="rId3" imgW="425" imgH="426" progId="TCLayout.ActiveDocument.1">
+                  <p:embed/>
+                </p:oleObj>
+              </mc:Choice>
+              <mc:Fallback>
+                <p:oleObj name="think-cell 幻灯片" r:id="rId3" imgW="425" imgH="426" progId="TCLayout.ActiveDocument.1">
+                  <p:embed/>
+                  <p:pic>
+                    <p:nvPicPr>
+                      <p:cNvPr id="5" name="对象 4" hidden="1">
+                        <a:extLst>
+                          <a:ext uri="{FF2B5EF4-FFF2-40B4-BE49-F238E27FC236}">
+                            <a16:creationId xmlns:a16="http://schemas.microsoft.com/office/drawing/2014/main" id="{8234209E-E7C6-79CC-CE17-26B6D9A95CAE}"/>
+                          </a:ext>
+                        </a:extLst>
+                      </p:cNvPr>
+                      <p:cNvPicPr/>
+                      <p:nvPr/>
+                    </p:nvPicPr>
+                    <p:blipFill>
+                      <a:blip r:embed="rId4"/>
+                      <a:stretch>
+                        <a:fillRect/>
+                      </a:stretch>
+                    </p:blipFill>
+                    <p:spPr>
+                      <a:xfrm>
+                        <a:off x="1588" y="1588"/>
+                        <a:ext cx="1588" cy="1588"/>
+                      </a:xfrm>
+                      <a:prstGeom prst="rect">
+                        <a:avLst/>
+                      </a:prstGeom>
+                    </p:spPr>
+                  </p:pic>
+                </p:oleObj>
+              </mc:Fallback>
+            </mc:AlternateContent>
+          </a:graphicData>
+        </a:graphic>
+      </p:graphicFrame>
+      <p:sp>
+        <p:nvSpPr>
+          <p:cNvPr id="2" name="标题 1">
+            <a:extLst>
+              <a:ext uri="{FF2B5EF4-FFF2-40B4-BE49-F238E27FC236}">
+                <a16:creationId xmlns:a16="http://schemas.microsoft.com/office/drawing/2014/main" id="{8BC45E94-F80B-E078-3930-B89ABCB39B61}"/>
+              </a:ext>
+            </a:extLst>
+          </p:cNvPr>
+          <p:cNvSpPr>
+            <a:spLocks noGrp="1"/>
+          </p:cNvSpPr>
+          <p:nvPr>
+            <p:ph type="title"/>
+          </p:nvPr>
+        </p:nvSpPr>
+        <p:spPr>
+          <a:xfrm>
+            <a:off x="378371" y="237181"/>
+            <a:ext cx="11254155" cy="463846"/>
+          </a:xfrm>
+        </p:spPr>
+        <p:txBody>
+          <a:bodyPr vert="horz"/>
+          <a:lstStyle/>
+          <a:p>
+            <a:r>
+              <a:rPr lang="en-US" altLang="zh-CN" dirty="0"/>
+              <a:t>【</a:t>
+            </a:r>
+            <a:r>
+              <a:rPr lang="zh-CN" altLang="en-US" dirty="0"/>
+              <a:t>本周关注</a:t>
+            </a:r>
+            <a:r>
+              <a:rPr lang="en-US" altLang="zh-CN" dirty="0"/>
+              <a:t>】</a:t>
+            </a:r>
+            <a:r>
+              <a:rPr lang="zh-CN" altLang="en-US" dirty="0"/>
+              <a:t>厂商</a:t>
+            </a:r>
+            <a:r>
+              <a:rPr lang="en-US" altLang="zh-CN" dirty="0"/>
+              <a:t>&amp;</a:t>
+            </a:r>
+            <a:r>
+              <a:rPr lang="zh-CN" altLang="en-US" dirty="0"/>
+              <a:t>投融资动态</a:t>
+            </a:r>
+          </a:p>
+        </p:txBody>
+      </p:sp>
+      <p:sp>
+        <p:nvSpPr>
+          <p:cNvPr id="3" name="文本占位符 2">
+            <a:extLst>
+              <a:ext uri="{FF2B5EF4-FFF2-40B4-BE49-F238E27FC236}">
+                <a16:creationId xmlns:a16="http://schemas.microsoft.com/office/drawing/2014/main" id="{6C027100-0C65-8C50-3FE6-405C0E4002EC}"/>
+              </a:ext>
+            </a:extLst>
+          </p:cNvPr>
+          <p:cNvSpPr>
+            <a:spLocks noGrp="1"/>
+          </p:cNvSpPr>
+          <p:nvPr>
+            <p:ph type="body" sz="quarter" idx="10"/>
+          </p:nvPr>
+        </p:nvSpPr>
+        <p:spPr/>
+        <p:txBody>
+          <a:bodyPr/>
+          <a:lstStyle/>
+          <a:p>
+            <a:endParaRPr lang="zh-CN" altLang="en-US" dirty="0"/>
+          </a:p>
+        </p:txBody>
+      </p:sp>
+      <p:sp>
+        <p:nvSpPr>
+          <p:cNvPr id="4" name="文本占位符 3">
+            <a:extLst>
+              <a:ext uri="{FF2B5EF4-FFF2-40B4-BE49-F238E27FC236}">
+                <a16:creationId xmlns:a16="http://schemas.microsoft.com/office/drawing/2014/main" id="{C48105A9-D22D-EECD-12B0-549C40CDCA54}"/>
+              </a:ext>
+            </a:extLst>
+          </p:cNvPr>
+          <p:cNvSpPr>
+            <a:spLocks noGrp="1"/>
+          </p:cNvSpPr>
+          <p:nvPr>
+            <p:ph type="body" sz="quarter" idx="11"/>
+          </p:nvPr>
+        </p:nvSpPr>
+        <p:spPr/>
+        <p:txBody>
+          <a:bodyPr/>
+          <a:lstStyle/>
+          <a:p>
+            <a:endParaRPr lang="zh-CN" altLang="en-US" dirty="0"/>
+          </a:p>
+        </p:txBody>
+      </p:sp>
+      <p:sp>
+        <p:nvSpPr>
+          <p:cNvPr id="12" name="矩形 11">
+            <a:extLst>
+              <a:ext uri="{FF2B5EF4-FFF2-40B4-BE49-F238E27FC236}">
+                <a16:creationId xmlns:a16="http://schemas.microsoft.com/office/drawing/2014/main" id="{FB7BDA76-9C39-93A3-BE43-61B86192F73D}"/>
+              </a:ext>
+            </a:extLst>
+          </p:cNvPr>
+          <p:cNvSpPr/>
+          <p:nvPr/>
+        </p:nvSpPr>
+        <p:spPr>
+          <a:xfrm>
+            <a:off x="547300" y="3793422"/>
+            <a:ext cx="8250192" cy="2453584"/>
+          </a:xfrm>
+          <a:prstGeom prst="rect">
+            <a:avLst/>
+          </a:prstGeom>
+          <a:solidFill>
+            <a:schemeClr val="bg1">
+              <a:lumMod val="95000"/>
+            </a:schemeClr>
+          </a:solidFill>
+          <a:ln>
+            <a:noFill/>
+          </a:ln>
+        </p:spPr>
+        <p:style>
+          <a:lnRef idx="2">
+            <a:schemeClr val="accent1">
+              <a:shade val="50000"/>
+            </a:schemeClr>
+          </a:lnRef>
+          <a:fillRef idx="1">
+            <a:schemeClr val="accent1"/>
+          </a:fillRef>
+          <a:effectRef idx="0">
+            <a:schemeClr val="accent1"/>
+          </a:effectRef>
+          <a:fontRef idx="minor">
+            <a:schemeClr val="lt1"/>
+          </a:fontRef>
+        </p:style>
+        <p:txBody>
+          <a:bodyPr rtlCol="0" anchor="ctr"/>
+          <a:lstStyle/>
+          <a:p>
+            <a:pPr marL="285750" indent="-285750">
+              <a:buFont typeface="Arial" panose="020B0604020202020204" pitchFamily="34" charset="0"/>
+              <a:buChar char="•"/>
+            </a:pPr>
+            <a:r>
+              <a:rPr kumimoji="1" lang="zh-CN" altLang="en-US" sz="1400" b="1" dirty="0">
+                <a:solidFill>
+                  <a:prstClr val="black"/>
+                </a:solidFill>
+                <a:latin typeface="华文楷体" panose="02010600040101010101" pitchFamily="2" charset="-122"/>
+                <a:ea typeface="华文楷体" panose="02010600040101010101" pitchFamily="2" charset="-122"/>
+              </a:rPr>
+              <a:t>新闻</a:t>
+            </a:r>
+            <a:r>
+              <a:rPr kumimoji="1" lang="zh-CN" altLang="en" sz="1400" b="1" dirty="0">
+                <a:solidFill>
+                  <a:prstClr val="black"/>
+                </a:solidFill>
+                <a:latin typeface="华文楷体" panose="02010600040101010101" pitchFamily="2" charset="-122"/>
+                <a:ea typeface="华文楷体" panose="02010600040101010101" pitchFamily="2" charset="-122"/>
+              </a:rPr>
+              <a:t>：</a:t>
+            </a:r>
+            <a:r>
+              <a:rPr kumimoji="1" lang="zh-CN" altLang="en-US" sz="1400" dirty="0">
+                <a:solidFill>
+                  <a:prstClr val="black"/>
+                </a:solidFill>
+                <a:latin typeface="华文楷体" panose="02010600040101010101" pitchFamily="2" charset="-122"/>
+                <a:ea typeface="华文楷体" panose="02010600040101010101" pitchFamily="2" charset="-122"/>
+              </a:rPr>
+              <a:t>正文</a:t>
+            </a:r>
+            <a:endParaRPr lang="zh-CN" altLang="en-US" sz="1400" dirty="0"/>
+          </a:p>
+          <a:p>
+            <a:pPr algn="l">
+              <a:lnSpc>
+                <a:spcPct val="130000"/>
+              </a:lnSpc>
+              <a:spcBef>
+                <a:spcPts val="0"/>
+              </a:spcBef>
+              <a:spcAft>
+                <a:spcPts val="0"/>
+              </a:spcAft>
+            </a:pPr>
+            <a:endParaRPr lang="zh-CN" altLang="en-US" sz="1400" dirty="0">
+              <a:effectLst/>
+            </a:endParaRPr>
+          </a:p>
+        </p:txBody>
+      </p:sp>
+      <p:sp>
+        <p:nvSpPr>
+          <p:cNvPr id="20" name="矩形 19">
+            <a:extLst>
+              <a:ext uri="{FF2B5EF4-FFF2-40B4-BE49-F238E27FC236}">
+                <a16:creationId xmlns:a16="http://schemas.microsoft.com/office/drawing/2014/main" id="{590CD911-4F0B-D723-D914-688DB5A851AE}"/>
+              </a:ext>
+            </a:extLst>
+          </p:cNvPr>
+          <p:cNvSpPr/>
+          <p:nvPr/>
+        </p:nvSpPr>
+        <p:spPr>
+          <a:xfrm>
+            <a:off x="547300" y="1017577"/>
+            <a:ext cx="8250192" cy="2569691"/>
+          </a:xfrm>
+          <a:prstGeom prst="rect">
+            <a:avLst/>
+          </a:prstGeom>
+          <a:solidFill>
+            <a:schemeClr val="bg1">
+              <a:lumMod val="95000"/>
+            </a:schemeClr>
+          </a:solidFill>
+          <a:ln>
+            <a:noFill/>
+          </a:ln>
+        </p:spPr>
+        <p:style>
+          <a:lnRef idx="2">
+            <a:schemeClr val="accent1">
+              <a:shade val="50000"/>
+            </a:schemeClr>
+          </a:lnRef>
+          <a:fillRef idx="1">
+            <a:schemeClr val="accent1"/>
+          </a:fillRef>
+          <a:effectRef idx="0">
+            <a:schemeClr val="accent1"/>
+          </a:effectRef>
+          <a:fontRef idx="minor">
+            <a:schemeClr val="lt1"/>
+          </a:fontRef>
+        </p:style>
+        <p:txBody>
+          <a:bodyPr rtlCol="0" anchor="ctr"/>
+          <a:lstStyle/>
+          <a:p>
+            <a:pPr marL="285750" indent="-285750" algn="l">
+              <a:lnSpc>
+                <a:spcPct val="130000"/>
+              </a:lnSpc>
+              <a:spcBef>
+                <a:spcPts val="0"/>
+              </a:spcBef>
+              <a:spcAft>
+                <a:spcPts val="0"/>
+              </a:spcAft>
+              <a:buFont typeface="Arial" panose="020B0604020202020204" pitchFamily="34" charset="0"/>
+              <a:buChar char="•"/>
+            </a:pPr>
+            <a:r>
+              <a:rPr kumimoji="1" lang="zh-CN" altLang="en-US" sz="1400" b="1" dirty="0">
+                <a:solidFill>
+                  <a:prstClr val="black"/>
+                </a:solidFill>
+                <a:latin typeface="华文楷体" panose="02010600040101010101" pitchFamily="2" charset="-122"/>
+                <a:ea typeface="华文楷体" panose="02010600040101010101" pitchFamily="2" charset="-122"/>
+              </a:rPr>
+              <a:t>新闻</a:t>
+            </a:r>
+            <a:r>
+              <a:rPr kumimoji="1" lang="zh-CN" altLang="en" sz="1400" b="1" dirty="0">
+                <a:solidFill>
+                  <a:prstClr val="black"/>
+                </a:solidFill>
+                <a:latin typeface="华文楷体" panose="02010600040101010101" pitchFamily="2" charset="-122"/>
+                <a:ea typeface="华文楷体" panose="02010600040101010101" pitchFamily="2" charset="-122"/>
+              </a:rPr>
+              <a:t>：</a:t>
+            </a:r>
+            <a:r>
+              <a:rPr kumimoji="1" lang="zh-CN" altLang="en-US" sz="1400" dirty="0">
+                <a:solidFill>
+                  <a:prstClr val="black"/>
+                </a:solidFill>
+                <a:latin typeface="华文楷体" panose="02010600040101010101" pitchFamily="2" charset="-122"/>
+                <a:ea typeface="华文楷体" panose="02010600040101010101" pitchFamily="2" charset="-122"/>
+              </a:rPr>
+              <a:t>正文</a:t>
+            </a:r>
+          </a:p>
+        </p:txBody>
+      </p:sp>
+      <p:sp>
+        <p:nvSpPr>
           <p:cNvPr id="6" name="文本框 5">
             <a:extLst>
               <a:ext uri="{FF2B5EF4-FFF2-40B4-BE49-F238E27FC236}">
@@ -3457,6 +4476,110 @@
               <a:latin typeface="华文楷体" panose="02010600040101010101" pitchFamily="2" charset="-122"/>
               <a:ea typeface="华文楷体" panose="02010600040101010101" pitchFamily="2" charset="-122"/>
             </a:endParaRPr>
+          </a:p>
+        </p:txBody>
+      </p:sp>
+      <p:sp>
+        <p:nvSpPr>
+          <p:cNvPr id="7" name="矩形 6">
+            <a:extLst>
+              <a:ext uri="{FF2B5EF4-FFF2-40B4-BE49-F238E27FC236}">
+                <a16:creationId xmlns:a16="http://schemas.microsoft.com/office/drawing/2014/main" id="{9CA4A4B7-A692-2C7C-760C-1FA41017D22D}"/>
+              </a:ext>
+            </a:extLst>
+          </p:cNvPr>
+          <p:cNvSpPr/>
+          <p:nvPr/>
+        </p:nvSpPr>
+        <p:spPr>
+          <a:xfrm>
+            <a:off x="9044609" y="1017577"/>
+            <a:ext cx="2703443" cy="2569691"/>
+          </a:xfrm>
+          <a:prstGeom prst="rect">
+            <a:avLst/>
+          </a:prstGeom>
+        </p:spPr>
+        <p:style>
+          <a:lnRef idx="2">
+            <a:schemeClr val="accent1">
+              <a:shade val="50000"/>
+            </a:schemeClr>
+          </a:lnRef>
+          <a:fillRef idx="1">
+            <a:schemeClr val="accent1"/>
+          </a:fillRef>
+          <a:effectRef idx="0">
+            <a:schemeClr val="accent1"/>
+          </a:effectRef>
+          <a:fontRef idx="minor">
+            <a:schemeClr val="lt1"/>
+          </a:fontRef>
+        </p:style>
+        <p:txBody>
+          <a:bodyPr rtlCol="0" anchor="ctr"/>
+          <a:lstStyle/>
+          <a:p>
+            <a:pPr algn="ctr"/>
+            <a:r>
+              <a:rPr kumimoji="1" lang="zh-CN" altLang="en-US" sz="1400" dirty="0">
+                <a:latin typeface="华文楷体" panose="02010600040101010101" pitchFamily="2" charset="-122"/>
+                <a:ea typeface="华文楷体" panose="02010600040101010101" pitchFamily="2" charset="-122"/>
+              </a:rPr>
+              <a:t>图片占位符</a:t>
+            </a:r>
+          </a:p>
+        </p:txBody>
+      </p:sp>
+      <p:sp>
+        <p:nvSpPr>
+          <p:cNvPr id="8" name="矩形 7">
+            <a:extLst>
+              <a:ext uri="{FF2B5EF4-FFF2-40B4-BE49-F238E27FC236}">
+                <a16:creationId xmlns:a16="http://schemas.microsoft.com/office/drawing/2014/main" id="{3A37C3ED-B04F-7C30-5404-A4C286AFF58B}"/>
+              </a:ext>
+            </a:extLst>
+          </p:cNvPr>
+          <p:cNvSpPr/>
+          <p:nvPr/>
+        </p:nvSpPr>
+        <p:spPr>
+          <a:xfrm>
+            <a:off x="9044609" y="3793422"/>
+            <a:ext cx="2703443" cy="2453583"/>
+          </a:xfrm>
+          <a:prstGeom prst="rect">
+            <a:avLst/>
+          </a:prstGeom>
+        </p:spPr>
+        <p:style>
+          <a:lnRef idx="2">
+            <a:schemeClr val="accent1">
+              <a:shade val="50000"/>
+            </a:schemeClr>
+          </a:lnRef>
+          <a:fillRef idx="1">
+            <a:schemeClr val="accent1"/>
+          </a:fillRef>
+          <a:effectRef idx="0">
+            <a:schemeClr val="accent1"/>
+          </a:effectRef>
+          <a:fontRef idx="minor">
+            <a:schemeClr val="lt1"/>
+          </a:fontRef>
+        </p:style>
+        <p:txBody>
+          <a:bodyPr rtlCol="0" anchor="ctr"/>
+          <a:lstStyle/>
+          <a:p>
+            <a:pPr algn="ctr"/>
+            <a:r>
+              <a:rPr kumimoji="1" lang="zh-CN" altLang="en-US" sz="1400" dirty="0">
+                <a:latin typeface="华文楷体" panose="02010600040101010101" pitchFamily="2" charset="-122"/>
+                <a:ea typeface="华文楷体" panose="02010600040101010101" pitchFamily="2" charset="-122"/>
+              </a:rPr>
+              <a:t>图片占位符</a:t>
+            </a:r>
           </a:p>
         </p:txBody>
       </p:sp>
@@ -3473,7 +4596,360 @@
 </p:sld>
 </file>
 
-<file path=ppt/slides/slide11.xml><?xml version="1.0" encoding="utf-8"?>
+<file path=ppt/slides/slide13.xml><?xml version="1.0" encoding="utf-8"?>
+<p:sld xmlns:a="http://schemas.openxmlformats.org/drawingml/2006/main" xmlns:r="http://schemas.openxmlformats.org/officeDocument/2006/relationships" xmlns:p="http://schemas.openxmlformats.org/presentationml/2006/main">
+  <p:cSld>
+    <p:spTree>
+      <p:nvGrpSpPr>
+        <p:cNvPr id="1" name="">
+          <a:extLst>
+            <a:ext uri="{FF2B5EF4-FFF2-40B4-BE49-F238E27FC236}">
+              <a16:creationId xmlns:a16="http://schemas.microsoft.com/office/drawing/2014/main" id="{DDC59D05-7984-A036-0333-73F9BE957D04}"/>
+            </a:ext>
+          </a:extLst>
+        </p:cNvPr>
+        <p:cNvGrpSpPr/>
+        <p:nvPr/>
+      </p:nvGrpSpPr>
+      <p:grpSpPr>
+        <a:xfrm>
+          <a:off x="0" y="0"/>
+          <a:ext cx="0" cy="0"/>
+          <a:chOff x="0" y="0"/>
+          <a:chExt cx="0" cy="0"/>
+        </a:xfrm>
+      </p:grpSpPr>
+      <p:graphicFrame>
+        <p:nvGraphicFramePr>
+          <p:cNvPr id="5" name="对象 4" hidden="1">
+            <a:extLst>
+              <a:ext uri="{FF2B5EF4-FFF2-40B4-BE49-F238E27FC236}">
+                <a16:creationId xmlns:a16="http://schemas.microsoft.com/office/drawing/2014/main" id="{47C0C972-2208-DF67-39E8-43E65AE488D2}"/>
+              </a:ext>
+            </a:extLst>
+          </p:cNvPr>
+          <p:cNvGraphicFramePr>
+            <a:graphicFrameLocks noChangeAspect="1"/>
+          </p:cNvGraphicFramePr>
+          <p:nvPr>
+            <p:custDataLst>
+              <p:tags r:id="rId1"/>
+            </p:custDataLst>
+          </p:nvPr>
+        </p:nvGraphicFramePr>
+        <p:xfrm>
+          <a:off x="1588" y="1588"/>
+          <a:ext cx="1588" cy="1588"/>
+        </p:xfrm>
+        <a:graphic>
+          <a:graphicData uri="http://schemas.openxmlformats.org/presentationml/2006/ole">
+            <mc:AlternateContent xmlns:mc="http://schemas.openxmlformats.org/markup-compatibility/2006">
+              <mc:Choice xmlns:v="urn:schemas-microsoft-com:vml" Requires="v">
+                <p:oleObj name="think-cell 幻灯片" r:id="rId3" imgW="425" imgH="426" progId="TCLayout.ActiveDocument.1">
+                  <p:embed/>
+                </p:oleObj>
+              </mc:Choice>
+              <mc:Fallback>
+                <p:oleObj name="think-cell 幻灯片" r:id="rId3" imgW="425" imgH="426" progId="TCLayout.ActiveDocument.1">
+                  <p:embed/>
+                  <p:pic>
+                    <p:nvPicPr>
+                      <p:cNvPr id="5" name="对象 4" hidden="1">
+                        <a:extLst>
+                          <a:ext uri="{FF2B5EF4-FFF2-40B4-BE49-F238E27FC236}">
+                            <a16:creationId xmlns:a16="http://schemas.microsoft.com/office/drawing/2014/main" id="{5BAFB25B-D68E-8020-6B4F-C0B7E39A3B19}"/>
+                          </a:ext>
+                        </a:extLst>
+                      </p:cNvPr>
+                      <p:cNvPicPr/>
+                      <p:nvPr/>
+                    </p:nvPicPr>
+                    <p:blipFill>
+                      <a:blip r:embed="rId4"/>
+                      <a:stretch>
+                        <a:fillRect/>
+                      </a:stretch>
+                    </p:blipFill>
+                    <p:spPr>
+                      <a:xfrm>
+                        <a:off x="1588" y="1588"/>
+                        <a:ext cx="1588" cy="1588"/>
+                      </a:xfrm>
+                      <a:prstGeom prst="rect">
+                        <a:avLst/>
+                      </a:prstGeom>
+                    </p:spPr>
+                  </p:pic>
+                </p:oleObj>
+              </mc:Fallback>
+            </mc:AlternateContent>
+          </a:graphicData>
+        </a:graphic>
+      </p:graphicFrame>
+      <p:sp>
+        <p:nvSpPr>
+          <p:cNvPr id="2" name="标题 1">
+            <a:extLst>
+              <a:ext uri="{FF2B5EF4-FFF2-40B4-BE49-F238E27FC236}">
+                <a16:creationId xmlns:a16="http://schemas.microsoft.com/office/drawing/2014/main" id="{5C3D9E6B-578E-58E4-06C2-AA00E33E3209}"/>
+              </a:ext>
+            </a:extLst>
+          </p:cNvPr>
+          <p:cNvSpPr>
+            <a:spLocks noGrp="1"/>
+          </p:cNvSpPr>
+          <p:nvPr>
+            <p:ph type="title"/>
+          </p:nvPr>
+        </p:nvSpPr>
+        <p:spPr>
+          <a:xfrm>
+            <a:off x="378371" y="237181"/>
+            <a:ext cx="11254155" cy="463846"/>
+          </a:xfrm>
+        </p:spPr>
+        <p:txBody>
+          <a:bodyPr vert="horz"/>
+          <a:lstStyle/>
+          <a:p>
+            <a:r>
+              <a:rPr lang="en-US" altLang="zh-CN" dirty="0"/>
+              <a:t>【</a:t>
+            </a:r>
+            <a:r>
+              <a:rPr lang="zh-CN" altLang="en-US" dirty="0"/>
+              <a:t>本周关注</a:t>
+            </a:r>
+            <a:r>
+              <a:rPr lang="en-US" altLang="zh-CN" dirty="0"/>
+              <a:t>】</a:t>
+            </a:r>
+            <a:r>
+              <a:rPr lang="zh-CN" altLang="en-US" dirty="0"/>
+              <a:t>厂商</a:t>
+            </a:r>
+            <a:r>
+              <a:rPr lang="en-US" altLang="zh-CN" dirty="0"/>
+              <a:t>&amp;</a:t>
+            </a:r>
+            <a:r>
+              <a:rPr lang="zh-CN" altLang="en-US" dirty="0"/>
+              <a:t>投融资动态</a:t>
+            </a:r>
+          </a:p>
+        </p:txBody>
+      </p:sp>
+      <p:sp>
+        <p:nvSpPr>
+          <p:cNvPr id="3" name="文本占位符 2">
+            <a:extLst>
+              <a:ext uri="{FF2B5EF4-FFF2-40B4-BE49-F238E27FC236}">
+                <a16:creationId xmlns:a16="http://schemas.microsoft.com/office/drawing/2014/main" id="{53314427-F92A-918C-BCD1-8808911D7454}"/>
+              </a:ext>
+            </a:extLst>
+          </p:cNvPr>
+          <p:cNvSpPr>
+            <a:spLocks noGrp="1"/>
+          </p:cNvSpPr>
+          <p:nvPr>
+            <p:ph type="body" sz="quarter" idx="10"/>
+          </p:nvPr>
+        </p:nvSpPr>
+        <p:spPr/>
+        <p:txBody>
+          <a:bodyPr/>
+          <a:lstStyle/>
+          <a:p>
+            <a:endParaRPr lang="zh-CN" altLang="en-US" dirty="0"/>
+          </a:p>
+        </p:txBody>
+      </p:sp>
+      <p:sp>
+        <p:nvSpPr>
+          <p:cNvPr id="4" name="文本占位符 3">
+            <a:extLst>
+              <a:ext uri="{FF2B5EF4-FFF2-40B4-BE49-F238E27FC236}">
+                <a16:creationId xmlns:a16="http://schemas.microsoft.com/office/drawing/2014/main" id="{031150EB-B373-8984-5B99-64817D8F6FDA}"/>
+              </a:ext>
+            </a:extLst>
+          </p:cNvPr>
+          <p:cNvSpPr>
+            <a:spLocks noGrp="1"/>
+          </p:cNvSpPr>
+          <p:nvPr>
+            <p:ph type="body" sz="quarter" idx="11"/>
+          </p:nvPr>
+        </p:nvSpPr>
+        <p:spPr/>
+        <p:txBody>
+          <a:bodyPr/>
+          <a:lstStyle/>
+          <a:p>
+            <a:endParaRPr lang="zh-CN" altLang="en-US" dirty="0"/>
+          </a:p>
+        </p:txBody>
+      </p:sp>
+      <p:sp>
+        <p:nvSpPr>
+          <p:cNvPr id="20" name="矩形 19">
+            <a:extLst>
+              <a:ext uri="{FF2B5EF4-FFF2-40B4-BE49-F238E27FC236}">
+                <a16:creationId xmlns:a16="http://schemas.microsoft.com/office/drawing/2014/main" id="{D53E4702-16C4-115D-9A96-2876A145ED88}"/>
+              </a:ext>
+            </a:extLst>
+          </p:cNvPr>
+          <p:cNvSpPr/>
+          <p:nvPr/>
+        </p:nvSpPr>
+        <p:spPr>
+          <a:xfrm>
+            <a:off x="567178" y="1961794"/>
+            <a:ext cx="8250192" cy="2569691"/>
+          </a:xfrm>
+          <a:prstGeom prst="rect">
+            <a:avLst/>
+          </a:prstGeom>
+          <a:solidFill>
+            <a:schemeClr val="bg1">
+              <a:lumMod val="95000"/>
+            </a:schemeClr>
+          </a:solidFill>
+          <a:ln>
+            <a:noFill/>
+          </a:ln>
+        </p:spPr>
+        <p:style>
+          <a:lnRef idx="2">
+            <a:schemeClr val="accent1">
+              <a:shade val="50000"/>
+            </a:schemeClr>
+          </a:lnRef>
+          <a:fillRef idx="1">
+            <a:schemeClr val="accent1"/>
+          </a:fillRef>
+          <a:effectRef idx="0">
+            <a:schemeClr val="accent1"/>
+          </a:effectRef>
+          <a:fontRef idx="minor">
+            <a:schemeClr val="lt1"/>
+          </a:fontRef>
+        </p:style>
+        <p:txBody>
+          <a:bodyPr rtlCol="0" anchor="ctr"/>
+          <a:lstStyle/>
+          <a:p>
+            <a:pPr marL="285750" indent="-285750" algn="l">
+              <a:lnSpc>
+                <a:spcPct val="130000"/>
+              </a:lnSpc>
+              <a:spcBef>
+                <a:spcPts val="0"/>
+              </a:spcBef>
+              <a:spcAft>
+                <a:spcPts val="0"/>
+              </a:spcAft>
+              <a:buFont typeface="Arial" panose="020B0604020202020204" pitchFamily="34" charset="0"/>
+              <a:buChar char="•"/>
+            </a:pPr>
+            <a:r>
+              <a:rPr kumimoji="1" lang="zh-CN" altLang="en-US" sz="1400" b="1" dirty="0">
+                <a:solidFill>
+                  <a:prstClr val="black"/>
+                </a:solidFill>
+                <a:latin typeface="华文楷体" panose="02010600040101010101" pitchFamily="2" charset="-122"/>
+                <a:ea typeface="华文楷体" panose="02010600040101010101" pitchFamily="2" charset="-122"/>
+              </a:rPr>
+              <a:t>新闻</a:t>
+            </a:r>
+            <a:r>
+              <a:rPr kumimoji="1" lang="zh-CN" altLang="en" sz="1400" b="1" dirty="0">
+                <a:solidFill>
+                  <a:prstClr val="black"/>
+                </a:solidFill>
+                <a:latin typeface="华文楷体" panose="02010600040101010101" pitchFamily="2" charset="-122"/>
+                <a:ea typeface="华文楷体" panose="02010600040101010101" pitchFamily="2" charset="-122"/>
+              </a:rPr>
+              <a:t>：</a:t>
+            </a:r>
+            <a:r>
+              <a:rPr kumimoji="1" lang="zh-CN" altLang="en-US" sz="1400" dirty="0">
+                <a:solidFill>
+                  <a:prstClr val="black"/>
+                </a:solidFill>
+                <a:latin typeface="华文楷体" panose="02010600040101010101" pitchFamily="2" charset="-122"/>
+                <a:ea typeface="华文楷体" panose="02010600040101010101" pitchFamily="2" charset="-122"/>
+              </a:rPr>
+              <a:t>正文</a:t>
+            </a:r>
+          </a:p>
+        </p:txBody>
+      </p:sp>
+      <p:sp>
+        <p:nvSpPr>
+          <p:cNvPr id="6" name="矩形 5">
+            <a:extLst>
+              <a:ext uri="{FF2B5EF4-FFF2-40B4-BE49-F238E27FC236}">
+                <a16:creationId xmlns:a16="http://schemas.microsoft.com/office/drawing/2014/main" id="{47241011-D6B0-575D-02C2-95F3F3E08E15}"/>
+              </a:ext>
+            </a:extLst>
+          </p:cNvPr>
+          <p:cNvSpPr/>
+          <p:nvPr/>
+        </p:nvSpPr>
+        <p:spPr>
+          <a:xfrm>
+            <a:off x="9044609" y="1961794"/>
+            <a:ext cx="2703443" cy="2569691"/>
+          </a:xfrm>
+          <a:prstGeom prst="rect">
+            <a:avLst/>
+          </a:prstGeom>
+        </p:spPr>
+        <p:style>
+          <a:lnRef idx="2">
+            <a:schemeClr val="accent1">
+              <a:shade val="50000"/>
+            </a:schemeClr>
+          </a:lnRef>
+          <a:fillRef idx="1">
+            <a:schemeClr val="accent1"/>
+          </a:fillRef>
+          <a:effectRef idx="0">
+            <a:schemeClr val="accent1"/>
+          </a:effectRef>
+          <a:fontRef idx="minor">
+            <a:schemeClr val="lt1"/>
+          </a:fontRef>
+        </p:style>
+        <p:txBody>
+          <a:bodyPr rtlCol="0" anchor="ctr"/>
+          <a:lstStyle/>
+          <a:p>
+            <a:pPr algn="ctr"/>
+            <a:r>
+              <a:rPr kumimoji="1" lang="zh-CN" altLang="en-US" sz="1400" dirty="0">
+                <a:latin typeface="华文楷体" panose="02010600040101010101" pitchFamily="2" charset="-122"/>
+                <a:ea typeface="华文楷体" panose="02010600040101010101" pitchFamily="2" charset="-122"/>
+              </a:rPr>
+              <a:t>图片占位符</a:t>
+            </a:r>
+          </a:p>
+        </p:txBody>
+      </p:sp>
+    </p:spTree>
+    <p:extLst>
+      <p:ext uri="{BB962C8B-B14F-4D97-AF65-F5344CB8AC3E}">
+        <p14:creationId xmlns:p14="http://schemas.microsoft.com/office/powerpoint/2010/main" val="2025202920"/>
+      </p:ext>
+    </p:extLst>
+  </p:cSld>
+  <p:clrMapOvr>
+    <a:masterClrMapping/>
+  </p:clrMapOvr>
+</p:sld>
+</file>
+
+<file path=ppt/slides/slide14.xml><?xml version="1.0" encoding="utf-8"?>
 <p:sld xmlns:a="http://schemas.openxmlformats.org/drawingml/2006/main" xmlns:r="http://schemas.openxmlformats.org/officeDocument/2006/relationships" xmlns:p="http://schemas.openxmlformats.org/presentationml/2006/main">
   <p:cSld>
     <p:spTree>
@@ -4254,6 +5730,110 @@
           </a:p>
         </p:txBody>
       </p:sp>
+      <p:sp>
+        <p:nvSpPr>
+          <p:cNvPr id="6" name="矩形 5">
+            <a:extLst>
+              <a:ext uri="{FF2B5EF4-FFF2-40B4-BE49-F238E27FC236}">
+                <a16:creationId xmlns:a16="http://schemas.microsoft.com/office/drawing/2014/main" id="{1EBED8A9-90BB-4022-C224-15AD81FA6156}"/>
+              </a:ext>
+            </a:extLst>
+          </p:cNvPr>
+          <p:cNvSpPr/>
+          <p:nvPr/>
+        </p:nvSpPr>
+        <p:spPr>
+          <a:xfrm>
+            <a:off x="9044609" y="1017577"/>
+            <a:ext cx="2703443" cy="2569691"/>
+          </a:xfrm>
+          <a:prstGeom prst="rect">
+            <a:avLst/>
+          </a:prstGeom>
+        </p:spPr>
+        <p:style>
+          <a:lnRef idx="2">
+            <a:schemeClr val="accent1">
+              <a:shade val="50000"/>
+            </a:schemeClr>
+          </a:lnRef>
+          <a:fillRef idx="1">
+            <a:schemeClr val="accent1"/>
+          </a:fillRef>
+          <a:effectRef idx="0">
+            <a:schemeClr val="accent1"/>
+          </a:effectRef>
+          <a:fontRef idx="minor">
+            <a:schemeClr val="lt1"/>
+          </a:fontRef>
+        </p:style>
+        <p:txBody>
+          <a:bodyPr rtlCol="0" anchor="ctr"/>
+          <a:lstStyle/>
+          <a:p>
+            <a:pPr algn="ctr"/>
+            <a:r>
+              <a:rPr kumimoji="1" lang="zh-CN" altLang="en-US" sz="1400" dirty="0">
+                <a:latin typeface="华文楷体" panose="02010600040101010101" pitchFamily="2" charset="-122"/>
+                <a:ea typeface="华文楷体" panose="02010600040101010101" pitchFamily="2" charset="-122"/>
+              </a:rPr>
+              <a:t>图片占位符</a:t>
+            </a:r>
+          </a:p>
+        </p:txBody>
+      </p:sp>
+      <p:sp>
+        <p:nvSpPr>
+          <p:cNvPr id="7" name="矩形 6">
+            <a:extLst>
+              <a:ext uri="{FF2B5EF4-FFF2-40B4-BE49-F238E27FC236}">
+                <a16:creationId xmlns:a16="http://schemas.microsoft.com/office/drawing/2014/main" id="{EFC053CB-F4B4-86D1-D414-AD6C60CEA1A2}"/>
+              </a:ext>
+            </a:extLst>
+          </p:cNvPr>
+          <p:cNvSpPr/>
+          <p:nvPr/>
+        </p:nvSpPr>
+        <p:spPr>
+          <a:xfrm>
+            <a:off x="9044609" y="3793422"/>
+            <a:ext cx="2703443" cy="2453583"/>
+          </a:xfrm>
+          <a:prstGeom prst="rect">
+            <a:avLst/>
+          </a:prstGeom>
+        </p:spPr>
+        <p:style>
+          <a:lnRef idx="2">
+            <a:schemeClr val="accent1">
+              <a:shade val="50000"/>
+            </a:schemeClr>
+          </a:lnRef>
+          <a:fillRef idx="1">
+            <a:schemeClr val="accent1"/>
+          </a:fillRef>
+          <a:effectRef idx="0">
+            <a:schemeClr val="accent1"/>
+          </a:effectRef>
+          <a:fontRef idx="minor">
+            <a:schemeClr val="lt1"/>
+          </a:fontRef>
+        </p:style>
+        <p:txBody>
+          <a:bodyPr rtlCol="0" anchor="ctr"/>
+          <a:lstStyle/>
+          <a:p>
+            <a:pPr algn="ctr"/>
+            <a:r>
+              <a:rPr kumimoji="1" lang="zh-CN" altLang="en-US" sz="1400" dirty="0">
+                <a:latin typeface="华文楷体" panose="02010600040101010101" pitchFamily="2" charset="-122"/>
+                <a:ea typeface="华文楷体" panose="02010600040101010101" pitchFamily="2" charset="-122"/>
+              </a:rPr>
+              <a:t>图片占位符</a:t>
+            </a:r>
+          </a:p>
+        </p:txBody>
+      </p:sp>
     </p:spTree>
     <p:extLst>
       <p:ext uri="{BB962C8B-B14F-4D97-AF65-F5344CB8AC3E}">
@@ -4650,6 +6230,110 @@
           </a:p>
         </p:txBody>
       </p:sp>
+      <p:sp>
+        <p:nvSpPr>
+          <p:cNvPr id="6" name="矩形 5">
+            <a:extLst>
+              <a:ext uri="{FF2B5EF4-FFF2-40B4-BE49-F238E27FC236}">
+                <a16:creationId xmlns:a16="http://schemas.microsoft.com/office/drawing/2014/main" id="{FD8B8780-F9CC-7CA5-3CEC-D0DE63C62861}"/>
+              </a:ext>
+            </a:extLst>
+          </p:cNvPr>
+          <p:cNvSpPr/>
+          <p:nvPr/>
+        </p:nvSpPr>
+        <p:spPr>
+          <a:xfrm>
+            <a:off x="9044609" y="1017577"/>
+            <a:ext cx="2703443" cy="2569691"/>
+          </a:xfrm>
+          <a:prstGeom prst="rect">
+            <a:avLst/>
+          </a:prstGeom>
+        </p:spPr>
+        <p:style>
+          <a:lnRef idx="2">
+            <a:schemeClr val="accent1">
+              <a:shade val="50000"/>
+            </a:schemeClr>
+          </a:lnRef>
+          <a:fillRef idx="1">
+            <a:schemeClr val="accent1"/>
+          </a:fillRef>
+          <a:effectRef idx="0">
+            <a:schemeClr val="accent1"/>
+          </a:effectRef>
+          <a:fontRef idx="minor">
+            <a:schemeClr val="lt1"/>
+          </a:fontRef>
+        </p:style>
+        <p:txBody>
+          <a:bodyPr rtlCol="0" anchor="ctr"/>
+          <a:lstStyle/>
+          <a:p>
+            <a:pPr algn="ctr"/>
+            <a:r>
+              <a:rPr kumimoji="1" lang="zh-CN" altLang="en-US" sz="1400" dirty="0">
+                <a:latin typeface="华文楷体" panose="02010600040101010101" pitchFamily="2" charset="-122"/>
+                <a:ea typeface="华文楷体" panose="02010600040101010101" pitchFamily="2" charset="-122"/>
+              </a:rPr>
+              <a:t>图片占位符</a:t>
+            </a:r>
+          </a:p>
+        </p:txBody>
+      </p:sp>
+      <p:sp>
+        <p:nvSpPr>
+          <p:cNvPr id="7" name="矩形 6">
+            <a:extLst>
+              <a:ext uri="{FF2B5EF4-FFF2-40B4-BE49-F238E27FC236}">
+                <a16:creationId xmlns:a16="http://schemas.microsoft.com/office/drawing/2014/main" id="{D1B27D32-28B2-19F6-4711-96B8893520F8}"/>
+              </a:ext>
+            </a:extLst>
+          </p:cNvPr>
+          <p:cNvSpPr/>
+          <p:nvPr/>
+        </p:nvSpPr>
+        <p:spPr>
+          <a:xfrm>
+            <a:off x="9044609" y="3793422"/>
+            <a:ext cx="2703443" cy="2453583"/>
+          </a:xfrm>
+          <a:prstGeom prst="rect">
+            <a:avLst/>
+          </a:prstGeom>
+        </p:spPr>
+        <p:style>
+          <a:lnRef idx="2">
+            <a:schemeClr val="accent1">
+              <a:shade val="50000"/>
+            </a:schemeClr>
+          </a:lnRef>
+          <a:fillRef idx="1">
+            <a:schemeClr val="accent1"/>
+          </a:fillRef>
+          <a:effectRef idx="0">
+            <a:schemeClr val="accent1"/>
+          </a:effectRef>
+          <a:fontRef idx="minor">
+            <a:schemeClr val="lt1"/>
+          </a:fontRef>
+        </p:style>
+        <p:txBody>
+          <a:bodyPr rtlCol="0" anchor="ctr"/>
+          <a:lstStyle/>
+          <a:p>
+            <a:pPr algn="ctr"/>
+            <a:r>
+              <a:rPr kumimoji="1" lang="zh-CN" altLang="en-US" sz="1400" dirty="0">
+                <a:latin typeface="华文楷体" panose="02010600040101010101" pitchFamily="2" charset="-122"/>
+                <a:ea typeface="华文楷体" panose="02010600040101010101" pitchFamily="2" charset="-122"/>
+              </a:rPr>
+              <a:t>图片占位符</a:t>
+            </a:r>
+          </a:p>
+        </p:txBody>
+      </p:sp>
     </p:spTree>
     <p:extLst>
       <p:ext uri="{BB962C8B-B14F-4D97-AF65-F5344CB8AC3E}">
@@ -5046,6 +6730,110 @@
           </a:p>
         </p:txBody>
       </p:sp>
+      <p:sp>
+        <p:nvSpPr>
+          <p:cNvPr id="6" name="矩形 5">
+            <a:extLst>
+              <a:ext uri="{FF2B5EF4-FFF2-40B4-BE49-F238E27FC236}">
+                <a16:creationId xmlns:a16="http://schemas.microsoft.com/office/drawing/2014/main" id="{6684BCD1-1E89-FFDD-1DFF-DE53A3D91AF1}"/>
+              </a:ext>
+            </a:extLst>
+          </p:cNvPr>
+          <p:cNvSpPr/>
+          <p:nvPr/>
+        </p:nvSpPr>
+        <p:spPr>
+          <a:xfrm>
+            <a:off x="9044609" y="1017577"/>
+            <a:ext cx="2703443" cy="2569691"/>
+          </a:xfrm>
+          <a:prstGeom prst="rect">
+            <a:avLst/>
+          </a:prstGeom>
+        </p:spPr>
+        <p:style>
+          <a:lnRef idx="2">
+            <a:schemeClr val="accent1">
+              <a:shade val="50000"/>
+            </a:schemeClr>
+          </a:lnRef>
+          <a:fillRef idx="1">
+            <a:schemeClr val="accent1"/>
+          </a:fillRef>
+          <a:effectRef idx="0">
+            <a:schemeClr val="accent1"/>
+          </a:effectRef>
+          <a:fontRef idx="minor">
+            <a:schemeClr val="lt1"/>
+          </a:fontRef>
+        </p:style>
+        <p:txBody>
+          <a:bodyPr rtlCol="0" anchor="ctr"/>
+          <a:lstStyle/>
+          <a:p>
+            <a:pPr algn="ctr"/>
+            <a:r>
+              <a:rPr kumimoji="1" lang="zh-CN" altLang="en-US" sz="1400" dirty="0">
+                <a:latin typeface="华文楷体" panose="02010600040101010101" pitchFamily="2" charset="-122"/>
+                <a:ea typeface="华文楷体" panose="02010600040101010101" pitchFamily="2" charset="-122"/>
+              </a:rPr>
+              <a:t>图片占位符</a:t>
+            </a:r>
+          </a:p>
+        </p:txBody>
+      </p:sp>
+      <p:sp>
+        <p:nvSpPr>
+          <p:cNvPr id="7" name="矩形 6">
+            <a:extLst>
+              <a:ext uri="{FF2B5EF4-FFF2-40B4-BE49-F238E27FC236}">
+                <a16:creationId xmlns:a16="http://schemas.microsoft.com/office/drawing/2014/main" id="{11F277F8-7FD0-3FF9-F45E-57C5D9858C6E}"/>
+              </a:ext>
+            </a:extLst>
+          </p:cNvPr>
+          <p:cNvSpPr/>
+          <p:nvPr/>
+        </p:nvSpPr>
+        <p:spPr>
+          <a:xfrm>
+            <a:off x="9044609" y="3793422"/>
+            <a:ext cx="2703443" cy="2453583"/>
+          </a:xfrm>
+          <a:prstGeom prst="rect">
+            <a:avLst/>
+          </a:prstGeom>
+        </p:spPr>
+        <p:style>
+          <a:lnRef idx="2">
+            <a:schemeClr val="accent1">
+              <a:shade val="50000"/>
+            </a:schemeClr>
+          </a:lnRef>
+          <a:fillRef idx="1">
+            <a:schemeClr val="accent1"/>
+          </a:fillRef>
+          <a:effectRef idx="0">
+            <a:schemeClr val="accent1"/>
+          </a:effectRef>
+          <a:fontRef idx="minor">
+            <a:schemeClr val="lt1"/>
+          </a:fontRef>
+        </p:style>
+        <p:txBody>
+          <a:bodyPr rtlCol="0" anchor="ctr"/>
+          <a:lstStyle/>
+          <a:p>
+            <a:pPr algn="ctr"/>
+            <a:r>
+              <a:rPr kumimoji="1" lang="zh-CN" altLang="en-US" sz="1400" dirty="0">
+                <a:latin typeface="华文楷体" panose="02010600040101010101" pitchFamily="2" charset="-122"/>
+                <a:ea typeface="华文楷体" panose="02010600040101010101" pitchFamily="2" charset="-122"/>
+              </a:rPr>
+              <a:t>图片占位符</a:t>
+            </a:r>
+          </a:p>
+        </p:txBody>
+      </p:sp>
     </p:spTree>
     <p:extLst>
       <p:ext uri="{BB962C8B-B14F-4D97-AF65-F5344CB8AC3E}">
@@ -5067,7 +6855,7 @@
         <p:cNvPr id="1" name="">
           <a:extLst>
             <a:ext uri="{FF2B5EF4-FFF2-40B4-BE49-F238E27FC236}">
-              <a16:creationId xmlns:a16="http://schemas.microsoft.com/office/drawing/2014/main" id="{DBBC4D01-24C2-BE71-207B-89AB7FF75752}"/>
+              <a16:creationId xmlns:a16="http://schemas.microsoft.com/office/drawing/2014/main" id="{099E3C59-F2E1-F384-C333-670BEA1C0268}"/>
             </a:ext>
           </a:extLst>
         </p:cNvPr>
@@ -5087,7 +6875,7 @@
           <p:cNvPr id="5" name="对象 4" hidden="1">
             <a:extLst>
               <a:ext uri="{FF2B5EF4-FFF2-40B4-BE49-F238E27FC236}">
-                <a16:creationId xmlns:a16="http://schemas.microsoft.com/office/drawing/2014/main" id="{F6D6C291-5179-D1C6-51F3-2F0EC23B3FBF}"/>
+                <a16:creationId xmlns:a16="http://schemas.microsoft.com/office/drawing/2014/main" id="{130CC9A2-7963-7CDB-76CE-405030ABE480}"/>
               </a:ext>
             </a:extLst>
           </p:cNvPr>
@@ -5154,6 +6942,351 @@
           <p:cNvPr id="2" name="标题 1">
             <a:extLst>
               <a:ext uri="{FF2B5EF4-FFF2-40B4-BE49-F238E27FC236}">
+                <a16:creationId xmlns:a16="http://schemas.microsoft.com/office/drawing/2014/main" id="{70D748BF-8730-E068-7C19-457A91B40382}"/>
+              </a:ext>
+            </a:extLst>
+          </p:cNvPr>
+          <p:cNvSpPr>
+            <a:spLocks noGrp="1"/>
+          </p:cNvSpPr>
+          <p:nvPr>
+            <p:ph type="title"/>
+          </p:nvPr>
+        </p:nvSpPr>
+        <p:spPr>
+          <a:xfrm>
+            <a:off x="378371" y="237181"/>
+            <a:ext cx="11254155" cy="463846"/>
+          </a:xfrm>
+        </p:spPr>
+        <p:txBody>
+          <a:bodyPr vert="horz"/>
+          <a:lstStyle/>
+          <a:p>
+            <a:r>
+              <a:rPr lang="en-US" altLang="zh-CN" dirty="0"/>
+              <a:t>【</a:t>
+            </a:r>
+            <a:r>
+              <a:rPr lang="zh-CN" altLang="en-US" dirty="0"/>
+              <a:t>本周关注</a:t>
+            </a:r>
+            <a:r>
+              <a:rPr lang="en-US" altLang="zh-CN" dirty="0"/>
+              <a:t>】</a:t>
+            </a:r>
+            <a:r>
+              <a:rPr lang="zh-CN" altLang="en-US" dirty="0"/>
+              <a:t>基础模型动态</a:t>
+            </a:r>
+          </a:p>
+        </p:txBody>
+      </p:sp>
+      <p:sp>
+        <p:nvSpPr>
+          <p:cNvPr id="3" name="文本占位符 2">
+            <a:extLst>
+              <a:ext uri="{FF2B5EF4-FFF2-40B4-BE49-F238E27FC236}">
+                <a16:creationId xmlns:a16="http://schemas.microsoft.com/office/drawing/2014/main" id="{B90B5529-19A6-ECDD-512C-3E843C2A4B7B}"/>
+              </a:ext>
+            </a:extLst>
+          </p:cNvPr>
+          <p:cNvSpPr>
+            <a:spLocks noGrp="1"/>
+          </p:cNvSpPr>
+          <p:nvPr>
+            <p:ph type="body" sz="quarter" idx="10"/>
+          </p:nvPr>
+        </p:nvSpPr>
+        <p:spPr/>
+        <p:txBody>
+          <a:bodyPr/>
+          <a:lstStyle/>
+          <a:p>
+            <a:endParaRPr lang="zh-CN" altLang="en-US" dirty="0"/>
+          </a:p>
+        </p:txBody>
+      </p:sp>
+      <p:sp>
+        <p:nvSpPr>
+          <p:cNvPr id="4" name="文本占位符 3">
+            <a:extLst>
+              <a:ext uri="{FF2B5EF4-FFF2-40B4-BE49-F238E27FC236}">
+                <a16:creationId xmlns:a16="http://schemas.microsoft.com/office/drawing/2014/main" id="{E7EFB660-8535-5428-02C6-B3E436563AA2}"/>
+              </a:ext>
+            </a:extLst>
+          </p:cNvPr>
+          <p:cNvSpPr>
+            <a:spLocks noGrp="1"/>
+          </p:cNvSpPr>
+          <p:nvPr>
+            <p:ph type="body" sz="quarter" idx="11"/>
+          </p:nvPr>
+        </p:nvSpPr>
+        <p:spPr/>
+        <p:txBody>
+          <a:bodyPr/>
+          <a:lstStyle/>
+          <a:p>
+            <a:endParaRPr lang="zh-CN" altLang="en-US" dirty="0"/>
+          </a:p>
+        </p:txBody>
+      </p:sp>
+      <p:sp>
+        <p:nvSpPr>
+          <p:cNvPr id="20" name="矩形 19">
+            <a:extLst>
+              <a:ext uri="{FF2B5EF4-FFF2-40B4-BE49-F238E27FC236}">
+                <a16:creationId xmlns:a16="http://schemas.microsoft.com/office/drawing/2014/main" id="{85C1A4C3-348F-258F-80E5-19BDB974C21A}"/>
+              </a:ext>
+            </a:extLst>
+          </p:cNvPr>
+          <p:cNvSpPr/>
+          <p:nvPr/>
+        </p:nvSpPr>
+        <p:spPr>
+          <a:xfrm>
+            <a:off x="567178" y="1961794"/>
+            <a:ext cx="8250192" cy="2569691"/>
+          </a:xfrm>
+          <a:prstGeom prst="rect">
+            <a:avLst/>
+          </a:prstGeom>
+          <a:solidFill>
+            <a:schemeClr val="bg1">
+              <a:lumMod val="95000"/>
+            </a:schemeClr>
+          </a:solidFill>
+          <a:ln>
+            <a:noFill/>
+          </a:ln>
+        </p:spPr>
+        <p:style>
+          <a:lnRef idx="2">
+            <a:schemeClr val="accent1">
+              <a:shade val="50000"/>
+            </a:schemeClr>
+          </a:lnRef>
+          <a:fillRef idx="1">
+            <a:schemeClr val="accent1"/>
+          </a:fillRef>
+          <a:effectRef idx="0">
+            <a:schemeClr val="accent1"/>
+          </a:effectRef>
+          <a:fontRef idx="minor">
+            <a:schemeClr val="lt1"/>
+          </a:fontRef>
+        </p:style>
+        <p:txBody>
+          <a:bodyPr rtlCol="0" anchor="ctr"/>
+          <a:lstStyle/>
+          <a:p>
+            <a:pPr marL="285750" indent="-285750" algn="l">
+              <a:lnSpc>
+                <a:spcPct val="130000"/>
+              </a:lnSpc>
+              <a:spcBef>
+                <a:spcPts val="0"/>
+              </a:spcBef>
+              <a:spcAft>
+                <a:spcPts val="0"/>
+              </a:spcAft>
+              <a:buFont typeface="Arial" panose="020B0604020202020204" pitchFamily="34" charset="0"/>
+              <a:buChar char="•"/>
+            </a:pPr>
+            <a:r>
+              <a:rPr kumimoji="1" lang="zh-CN" altLang="en-US" sz="1400" b="1" dirty="0">
+                <a:solidFill>
+                  <a:prstClr val="black"/>
+                </a:solidFill>
+                <a:latin typeface="华文楷体" panose="02010600040101010101" pitchFamily="2" charset="-122"/>
+                <a:ea typeface="华文楷体" panose="02010600040101010101" pitchFamily="2" charset="-122"/>
+              </a:rPr>
+              <a:t>新闻</a:t>
+            </a:r>
+            <a:r>
+              <a:rPr kumimoji="1" lang="zh-CN" altLang="en" sz="1400" b="1" dirty="0">
+                <a:solidFill>
+                  <a:prstClr val="black"/>
+                </a:solidFill>
+                <a:latin typeface="华文楷体" panose="02010600040101010101" pitchFamily="2" charset="-122"/>
+                <a:ea typeface="华文楷体" panose="02010600040101010101" pitchFamily="2" charset="-122"/>
+              </a:rPr>
+              <a:t>：</a:t>
+            </a:r>
+            <a:r>
+              <a:rPr kumimoji="1" lang="zh-CN" altLang="en-US" sz="1400" dirty="0">
+                <a:solidFill>
+                  <a:prstClr val="black"/>
+                </a:solidFill>
+                <a:latin typeface="华文楷体" panose="02010600040101010101" pitchFamily="2" charset="-122"/>
+                <a:ea typeface="华文楷体" panose="02010600040101010101" pitchFamily="2" charset="-122"/>
+              </a:rPr>
+              <a:t>正文</a:t>
+            </a:r>
+          </a:p>
+        </p:txBody>
+      </p:sp>
+      <p:sp>
+        <p:nvSpPr>
+          <p:cNvPr id="6" name="矩形 5">
+            <a:extLst>
+              <a:ext uri="{FF2B5EF4-FFF2-40B4-BE49-F238E27FC236}">
+                <a16:creationId xmlns:a16="http://schemas.microsoft.com/office/drawing/2014/main" id="{790DC03F-115A-8E98-FF08-80771BC7A886}"/>
+              </a:ext>
+            </a:extLst>
+          </p:cNvPr>
+          <p:cNvSpPr/>
+          <p:nvPr/>
+        </p:nvSpPr>
+        <p:spPr>
+          <a:xfrm>
+            <a:off x="9044609" y="1961794"/>
+            <a:ext cx="2703443" cy="2569691"/>
+          </a:xfrm>
+          <a:prstGeom prst="rect">
+            <a:avLst/>
+          </a:prstGeom>
+        </p:spPr>
+        <p:style>
+          <a:lnRef idx="2">
+            <a:schemeClr val="accent1">
+              <a:shade val="50000"/>
+            </a:schemeClr>
+          </a:lnRef>
+          <a:fillRef idx="1">
+            <a:schemeClr val="accent1"/>
+          </a:fillRef>
+          <a:effectRef idx="0">
+            <a:schemeClr val="accent1"/>
+          </a:effectRef>
+          <a:fontRef idx="minor">
+            <a:schemeClr val="lt1"/>
+          </a:fontRef>
+        </p:style>
+        <p:txBody>
+          <a:bodyPr rtlCol="0" anchor="ctr"/>
+          <a:lstStyle/>
+          <a:p>
+            <a:pPr algn="ctr"/>
+            <a:r>
+              <a:rPr kumimoji="1" lang="zh-CN" altLang="en-US" sz="1400" dirty="0">
+                <a:latin typeface="华文楷体" panose="02010600040101010101" pitchFamily="2" charset="-122"/>
+                <a:ea typeface="华文楷体" panose="02010600040101010101" pitchFamily="2" charset="-122"/>
+              </a:rPr>
+              <a:t>图片占位符</a:t>
+            </a:r>
+          </a:p>
+        </p:txBody>
+      </p:sp>
+    </p:spTree>
+    <p:extLst>
+      <p:ext uri="{BB962C8B-B14F-4D97-AF65-F5344CB8AC3E}">
+        <p14:creationId xmlns:p14="http://schemas.microsoft.com/office/powerpoint/2010/main" val="3037595580"/>
+      </p:ext>
+    </p:extLst>
+  </p:cSld>
+  <p:clrMapOvr>
+    <a:masterClrMapping/>
+  </p:clrMapOvr>
+</p:sld>
+</file>
+
+<file path=ppt/slides/slide6.xml><?xml version="1.0" encoding="utf-8"?>
+<p:sld xmlns:a="http://schemas.openxmlformats.org/drawingml/2006/main" xmlns:r="http://schemas.openxmlformats.org/officeDocument/2006/relationships" xmlns:p="http://schemas.openxmlformats.org/presentationml/2006/main">
+  <p:cSld>
+    <p:spTree>
+      <p:nvGrpSpPr>
+        <p:cNvPr id="1" name="">
+          <a:extLst>
+            <a:ext uri="{FF2B5EF4-FFF2-40B4-BE49-F238E27FC236}">
+              <a16:creationId xmlns:a16="http://schemas.microsoft.com/office/drawing/2014/main" id="{DBBC4D01-24C2-BE71-207B-89AB7FF75752}"/>
+            </a:ext>
+          </a:extLst>
+        </p:cNvPr>
+        <p:cNvGrpSpPr/>
+        <p:nvPr/>
+      </p:nvGrpSpPr>
+      <p:grpSpPr>
+        <a:xfrm>
+          <a:off x="0" y="0"/>
+          <a:ext cx="0" cy="0"/>
+          <a:chOff x="0" y="0"/>
+          <a:chExt cx="0" cy="0"/>
+        </a:xfrm>
+      </p:grpSpPr>
+      <p:graphicFrame>
+        <p:nvGraphicFramePr>
+          <p:cNvPr id="5" name="对象 4" hidden="1">
+            <a:extLst>
+              <a:ext uri="{FF2B5EF4-FFF2-40B4-BE49-F238E27FC236}">
+                <a16:creationId xmlns:a16="http://schemas.microsoft.com/office/drawing/2014/main" id="{F6D6C291-5179-D1C6-51F3-2F0EC23B3FBF}"/>
+              </a:ext>
+            </a:extLst>
+          </p:cNvPr>
+          <p:cNvGraphicFramePr>
+            <a:graphicFrameLocks noChangeAspect="1"/>
+          </p:cNvGraphicFramePr>
+          <p:nvPr>
+            <p:custDataLst>
+              <p:tags r:id="rId1"/>
+            </p:custDataLst>
+          </p:nvPr>
+        </p:nvGraphicFramePr>
+        <p:xfrm>
+          <a:off x="1588" y="1588"/>
+          <a:ext cx="1588" cy="1588"/>
+        </p:xfrm>
+        <a:graphic>
+          <a:graphicData uri="http://schemas.openxmlformats.org/presentationml/2006/ole">
+            <mc:AlternateContent xmlns:mc="http://schemas.openxmlformats.org/markup-compatibility/2006">
+              <mc:Choice xmlns:v="urn:schemas-microsoft-com:vml" Requires="v">
+                <p:oleObj name="think-cell 幻灯片" r:id="rId3" imgW="425" imgH="426" progId="TCLayout.ActiveDocument.1">
+                  <p:embed/>
+                </p:oleObj>
+              </mc:Choice>
+              <mc:Fallback>
+                <p:oleObj name="think-cell 幻灯片" r:id="rId3" imgW="425" imgH="426" progId="TCLayout.ActiveDocument.1">
+                  <p:embed/>
+                  <p:pic>
+                    <p:nvPicPr>
+                      <p:cNvPr id="5" name="对象 4" hidden="1">
+                        <a:extLst>
+                          <a:ext uri="{FF2B5EF4-FFF2-40B4-BE49-F238E27FC236}">
+                            <a16:creationId xmlns:a16="http://schemas.microsoft.com/office/drawing/2014/main" id="{3045F65F-4926-8417-3060-D29FC02A2760}"/>
+                          </a:ext>
+                        </a:extLst>
+                      </p:cNvPr>
+                      <p:cNvPicPr/>
+                      <p:nvPr/>
+                    </p:nvPicPr>
+                    <p:blipFill>
+                      <a:blip r:embed="rId4"/>
+                      <a:stretch>
+                        <a:fillRect/>
+                      </a:stretch>
+                    </p:blipFill>
+                    <p:spPr>
+                      <a:xfrm>
+                        <a:off x="1588" y="1588"/>
+                        <a:ext cx="1588" cy="1588"/>
+                      </a:xfrm>
+                      <a:prstGeom prst="rect">
+                        <a:avLst/>
+                      </a:prstGeom>
+                    </p:spPr>
+                  </p:pic>
+                </p:oleObj>
+              </mc:Fallback>
+            </mc:AlternateContent>
+          </a:graphicData>
+        </a:graphic>
+      </p:graphicFrame>
+      <p:sp>
+        <p:nvSpPr>
+          <p:cNvPr id="2" name="标题 1">
+            <a:extLst>
+              <a:ext uri="{FF2B5EF4-FFF2-40B4-BE49-F238E27FC236}">
                 <a16:creationId xmlns:a16="http://schemas.microsoft.com/office/drawing/2014/main" id="{E343D8D6-5511-1252-D155-D1CAE1291243}"/>
               </a:ext>
             </a:extLst>
@@ -5442,6 +7575,110 @@
           </a:p>
         </p:txBody>
       </p:sp>
+      <p:sp>
+        <p:nvSpPr>
+          <p:cNvPr id="6" name="矩形 5">
+            <a:extLst>
+              <a:ext uri="{FF2B5EF4-FFF2-40B4-BE49-F238E27FC236}">
+                <a16:creationId xmlns:a16="http://schemas.microsoft.com/office/drawing/2014/main" id="{C28BC5C6-96BA-CFAD-F684-96EA47F10455}"/>
+              </a:ext>
+            </a:extLst>
+          </p:cNvPr>
+          <p:cNvSpPr/>
+          <p:nvPr/>
+        </p:nvSpPr>
+        <p:spPr>
+          <a:xfrm>
+            <a:off x="9044609" y="1017577"/>
+            <a:ext cx="2703443" cy="2569691"/>
+          </a:xfrm>
+          <a:prstGeom prst="rect">
+            <a:avLst/>
+          </a:prstGeom>
+        </p:spPr>
+        <p:style>
+          <a:lnRef idx="2">
+            <a:schemeClr val="accent1">
+              <a:shade val="50000"/>
+            </a:schemeClr>
+          </a:lnRef>
+          <a:fillRef idx="1">
+            <a:schemeClr val="accent1"/>
+          </a:fillRef>
+          <a:effectRef idx="0">
+            <a:schemeClr val="accent1"/>
+          </a:effectRef>
+          <a:fontRef idx="minor">
+            <a:schemeClr val="lt1"/>
+          </a:fontRef>
+        </p:style>
+        <p:txBody>
+          <a:bodyPr rtlCol="0" anchor="ctr"/>
+          <a:lstStyle/>
+          <a:p>
+            <a:pPr algn="ctr"/>
+            <a:r>
+              <a:rPr kumimoji="1" lang="zh-CN" altLang="en-US" sz="1400" dirty="0">
+                <a:latin typeface="华文楷体" panose="02010600040101010101" pitchFamily="2" charset="-122"/>
+                <a:ea typeface="华文楷体" panose="02010600040101010101" pitchFamily="2" charset="-122"/>
+              </a:rPr>
+              <a:t>图片占位符</a:t>
+            </a:r>
+          </a:p>
+        </p:txBody>
+      </p:sp>
+      <p:sp>
+        <p:nvSpPr>
+          <p:cNvPr id="7" name="矩形 6">
+            <a:extLst>
+              <a:ext uri="{FF2B5EF4-FFF2-40B4-BE49-F238E27FC236}">
+                <a16:creationId xmlns:a16="http://schemas.microsoft.com/office/drawing/2014/main" id="{ED21E8E1-018F-916D-0F69-1F5946A8C657}"/>
+              </a:ext>
+            </a:extLst>
+          </p:cNvPr>
+          <p:cNvSpPr/>
+          <p:nvPr/>
+        </p:nvSpPr>
+        <p:spPr>
+          <a:xfrm>
+            <a:off x="9044609" y="3793422"/>
+            <a:ext cx="2703443" cy="2453583"/>
+          </a:xfrm>
+          <a:prstGeom prst="rect">
+            <a:avLst/>
+          </a:prstGeom>
+        </p:spPr>
+        <p:style>
+          <a:lnRef idx="2">
+            <a:schemeClr val="accent1">
+              <a:shade val="50000"/>
+            </a:schemeClr>
+          </a:lnRef>
+          <a:fillRef idx="1">
+            <a:schemeClr val="accent1"/>
+          </a:fillRef>
+          <a:effectRef idx="0">
+            <a:schemeClr val="accent1"/>
+          </a:effectRef>
+          <a:fontRef idx="minor">
+            <a:schemeClr val="lt1"/>
+          </a:fontRef>
+        </p:style>
+        <p:txBody>
+          <a:bodyPr rtlCol="0" anchor="ctr"/>
+          <a:lstStyle/>
+          <a:p>
+            <a:pPr algn="ctr"/>
+            <a:r>
+              <a:rPr kumimoji="1" lang="zh-CN" altLang="en-US" sz="1400" dirty="0">
+                <a:latin typeface="华文楷体" panose="02010600040101010101" pitchFamily="2" charset="-122"/>
+                <a:ea typeface="华文楷体" panose="02010600040101010101" pitchFamily="2" charset="-122"/>
+              </a:rPr>
+              <a:t>图片占位符</a:t>
+            </a:r>
+          </a:p>
+        </p:txBody>
+      </p:sp>
     </p:spTree>
     <p:extLst>
       <p:ext uri="{BB962C8B-B14F-4D97-AF65-F5344CB8AC3E}">
@@ -5455,7 +7692,7 @@
 </p:sld>
 </file>
 
-<file path=ppt/slides/slide6.xml><?xml version="1.0" encoding="utf-8"?>
+<file path=ppt/slides/slide7.xml><?xml version="1.0" encoding="utf-8"?>
 <p:sld xmlns:a="http://schemas.openxmlformats.org/drawingml/2006/main" xmlns:r="http://schemas.openxmlformats.org/officeDocument/2006/relationships" xmlns:p="http://schemas.openxmlformats.org/presentationml/2006/main">
   <p:cSld>
     <p:spTree>
@@ -5838,6 +8075,110 @@
           </a:p>
         </p:txBody>
       </p:sp>
+      <p:sp>
+        <p:nvSpPr>
+          <p:cNvPr id="6" name="矩形 5">
+            <a:extLst>
+              <a:ext uri="{FF2B5EF4-FFF2-40B4-BE49-F238E27FC236}">
+                <a16:creationId xmlns:a16="http://schemas.microsoft.com/office/drawing/2014/main" id="{393C0C3F-E2FB-D257-C8BA-3820F73BDE3B}"/>
+              </a:ext>
+            </a:extLst>
+          </p:cNvPr>
+          <p:cNvSpPr/>
+          <p:nvPr/>
+        </p:nvSpPr>
+        <p:spPr>
+          <a:xfrm>
+            <a:off x="9044609" y="1017577"/>
+            <a:ext cx="2703443" cy="2569691"/>
+          </a:xfrm>
+          <a:prstGeom prst="rect">
+            <a:avLst/>
+          </a:prstGeom>
+        </p:spPr>
+        <p:style>
+          <a:lnRef idx="2">
+            <a:schemeClr val="accent1">
+              <a:shade val="50000"/>
+            </a:schemeClr>
+          </a:lnRef>
+          <a:fillRef idx="1">
+            <a:schemeClr val="accent1"/>
+          </a:fillRef>
+          <a:effectRef idx="0">
+            <a:schemeClr val="accent1"/>
+          </a:effectRef>
+          <a:fontRef idx="minor">
+            <a:schemeClr val="lt1"/>
+          </a:fontRef>
+        </p:style>
+        <p:txBody>
+          <a:bodyPr rtlCol="0" anchor="ctr"/>
+          <a:lstStyle/>
+          <a:p>
+            <a:pPr algn="ctr"/>
+            <a:r>
+              <a:rPr kumimoji="1" lang="zh-CN" altLang="en-US" sz="1400" dirty="0">
+                <a:latin typeface="华文楷体" panose="02010600040101010101" pitchFamily="2" charset="-122"/>
+                <a:ea typeface="华文楷体" panose="02010600040101010101" pitchFamily="2" charset="-122"/>
+              </a:rPr>
+              <a:t>图片占位符</a:t>
+            </a:r>
+          </a:p>
+        </p:txBody>
+      </p:sp>
+      <p:sp>
+        <p:nvSpPr>
+          <p:cNvPr id="7" name="矩形 6">
+            <a:extLst>
+              <a:ext uri="{FF2B5EF4-FFF2-40B4-BE49-F238E27FC236}">
+                <a16:creationId xmlns:a16="http://schemas.microsoft.com/office/drawing/2014/main" id="{61B28D93-4F06-7936-E4C1-B32383A71473}"/>
+              </a:ext>
+            </a:extLst>
+          </p:cNvPr>
+          <p:cNvSpPr/>
+          <p:nvPr/>
+        </p:nvSpPr>
+        <p:spPr>
+          <a:xfrm>
+            <a:off x="9044609" y="3793422"/>
+            <a:ext cx="2703443" cy="2453583"/>
+          </a:xfrm>
+          <a:prstGeom prst="rect">
+            <a:avLst/>
+          </a:prstGeom>
+        </p:spPr>
+        <p:style>
+          <a:lnRef idx="2">
+            <a:schemeClr val="accent1">
+              <a:shade val="50000"/>
+            </a:schemeClr>
+          </a:lnRef>
+          <a:fillRef idx="1">
+            <a:schemeClr val="accent1"/>
+          </a:fillRef>
+          <a:effectRef idx="0">
+            <a:schemeClr val="accent1"/>
+          </a:effectRef>
+          <a:fontRef idx="minor">
+            <a:schemeClr val="lt1"/>
+          </a:fontRef>
+        </p:style>
+        <p:txBody>
+          <a:bodyPr rtlCol="0" anchor="ctr"/>
+          <a:lstStyle/>
+          <a:p>
+            <a:pPr algn="ctr"/>
+            <a:r>
+              <a:rPr kumimoji="1" lang="zh-CN" altLang="en-US" sz="1400" dirty="0">
+                <a:latin typeface="华文楷体" panose="02010600040101010101" pitchFamily="2" charset="-122"/>
+                <a:ea typeface="华文楷体" panose="02010600040101010101" pitchFamily="2" charset="-122"/>
+              </a:rPr>
+              <a:t>图片占位符</a:t>
+            </a:r>
+          </a:p>
+        </p:txBody>
+      </p:sp>
     </p:spTree>
     <p:extLst>
       <p:ext uri="{BB962C8B-B14F-4D97-AF65-F5344CB8AC3E}">
@@ -5851,7 +8192,7 @@
 </p:sld>
 </file>
 
-<file path=ppt/slides/slide7.xml><?xml version="1.0" encoding="utf-8"?>
+<file path=ppt/slides/slide8.xml><?xml version="1.0" encoding="utf-8"?>
 <p:sld xmlns:a="http://schemas.openxmlformats.org/drawingml/2006/main" xmlns:r="http://schemas.openxmlformats.org/officeDocument/2006/relationships" xmlns:p="http://schemas.openxmlformats.org/presentationml/2006/main">
   <p:cSld>
     <p:spTree>
@@ -6234,6 +8575,110 @@
           </a:p>
         </p:txBody>
       </p:sp>
+      <p:sp>
+        <p:nvSpPr>
+          <p:cNvPr id="6" name="矩形 5">
+            <a:extLst>
+              <a:ext uri="{FF2B5EF4-FFF2-40B4-BE49-F238E27FC236}">
+                <a16:creationId xmlns:a16="http://schemas.microsoft.com/office/drawing/2014/main" id="{89B476E5-A5D7-FD8A-A4F4-1951DB9BF956}"/>
+              </a:ext>
+            </a:extLst>
+          </p:cNvPr>
+          <p:cNvSpPr/>
+          <p:nvPr/>
+        </p:nvSpPr>
+        <p:spPr>
+          <a:xfrm>
+            <a:off x="9044609" y="1017577"/>
+            <a:ext cx="2703443" cy="2569691"/>
+          </a:xfrm>
+          <a:prstGeom prst="rect">
+            <a:avLst/>
+          </a:prstGeom>
+        </p:spPr>
+        <p:style>
+          <a:lnRef idx="2">
+            <a:schemeClr val="accent1">
+              <a:shade val="50000"/>
+            </a:schemeClr>
+          </a:lnRef>
+          <a:fillRef idx="1">
+            <a:schemeClr val="accent1"/>
+          </a:fillRef>
+          <a:effectRef idx="0">
+            <a:schemeClr val="accent1"/>
+          </a:effectRef>
+          <a:fontRef idx="minor">
+            <a:schemeClr val="lt1"/>
+          </a:fontRef>
+        </p:style>
+        <p:txBody>
+          <a:bodyPr rtlCol="0" anchor="ctr"/>
+          <a:lstStyle/>
+          <a:p>
+            <a:pPr algn="ctr"/>
+            <a:r>
+              <a:rPr kumimoji="1" lang="zh-CN" altLang="en-US" sz="1400" dirty="0">
+                <a:latin typeface="华文楷体" panose="02010600040101010101" pitchFamily="2" charset="-122"/>
+                <a:ea typeface="华文楷体" panose="02010600040101010101" pitchFamily="2" charset="-122"/>
+              </a:rPr>
+              <a:t>图片占位符</a:t>
+            </a:r>
+          </a:p>
+        </p:txBody>
+      </p:sp>
+      <p:sp>
+        <p:nvSpPr>
+          <p:cNvPr id="7" name="矩形 6">
+            <a:extLst>
+              <a:ext uri="{FF2B5EF4-FFF2-40B4-BE49-F238E27FC236}">
+                <a16:creationId xmlns:a16="http://schemas.microsoft.com/office/drawing/2014/main" id="{870A5D11-9AC8-46C3-38F3-0085651CF89D}"/>
+              </a:ext>
+            </a:extLst>
+          </p:cNvPr>
+          <p:cNvSpPr/>
+          <p:nvPr/>
+        </p:nvSpPr>
+        <p:spPr>
+          <a:xfrm>
+            <a:off x="9044609" y="3793422"/>
+            <a:ext cx="2703443" cy="2453583"/>
+          </a:xfrm>
+          <a:prstGeom prst="rect">
+            <a:avLst/>
+          </a:prstGeom>
+        </p:spPr>
+        <p:style>
+          <a:lnRef idx="2">
+            <a:schemeClr val="accent1">
+              <a:shade val="50000"/>
+            </a:schemeClr>
+          </a:lnRef>
+          <a:fillRef idx="1">
+            <a:schemeClr val="accent1"/>
+          </a:fillRef>
+          <a:effectRef idx="0">
+            <a:schemeClr val="accent1"/>
+          </a:effectRef>
+          <a:fontRef idx="minor">
+            <a:schemeClr val="lt1"/>
+          </a:fontRef>
+        </p:style>
+        <p:txBody>
+          <a:bodyPr rtlCol="0" anchor="ctr"/>
+          <a:lstStyle/>
+          <a:p>
+            <a:pPr algn="ctr"/>
+            <a:r>
+              <a:rPr kumimoji="1" lang="zh-CN" altLang="en-US" sz="1400" dirty="0">
+                <a:latin typeface="华文楷体" panose="02010600040101010101" pitchFamily="2" charset="-122"/>
+                <a:ea typeface="华文楷体" panose="02010600040101010101" pitchFamily="2" charset="-122"/>
+              </a:rPr>
+              <a:t>图片占位符</a:t>
+            </a:r>
+          </a:p>
+        </p:txBody>
+      </p:sp>
     </p:spTree>
     <p:extLst>
       <p:ext uri="{BB962C8B-B14F-4D97-AF65-F5344CB8AC3E}">
@@ -6247,7 +8692,7 @@
 </p:sld>
 </file>
 
-<file path=ppt/slides/slide8.xml><?xml version="1.0" encoding="utf-8"?>
+<file path=ppt/slides/slide9.xml><?xml version="1.0" encoding="utf-8"?>
 <p:sld xmlns:a="http://schemas.openxmlformats.org/drawingml/2006/main" xmlns:r="http://schemas.openxmlformats.org/officeDocument/2006/relationships" xmlns:p="http://schemas.openxmlformats.org/presentationml/2006/main">
   <p:cSld>
     <p:spTree>
@@ -6255,7 +8700,7 @@
         <p:cNvPr id="1" name="">
           <a:extLst>
             <a:ext uri="{FF2B5EF4-FFF2-40B4-BE49-F238E27FC236}">
-              <a16:creationId xmlns:a16="http://schemas.microsoft.com/office/drawing/2014/main" id="{B5B4EEC0-36D2-4F96-1789-35A309D947CA}"/>
+              <a16:creationId xmlns:a16="http://schemas.microsoft.com/office/drawing/2014/main" id="{9A575DD2-8DCA-42EA-F9AB-FAA1E4F23C60}"/>
             </a:ext>
           </a:extLst>
         </p:cNvPr>
@@ -6275,7 +8720,7 @@
           <p:cNvPr id="5" name="对象 4" hidden="1">
             <a:extLst>
               <a:ext uri="{FF2B5EF4-FFF2-40B4-BE49-F238E27FC236}">
-                <a16:creationId xmlns:a16="http://schemas.microsoft.com/office/drawing/2014/main" id="{8234209E-E7C6-79CC-CE17-26B6D9A95CAE}"/>
+                <a16:creationId xmlns:a16="http://schemas.microsoft.com/office/drawing/2014/main" id="{5BAFB25B-D68E-8020-6B4F-C0B7E39A3B19}"/>
               </a:ext>
             </a:extLst>
           </p:cNvPr>
@@ -6308,7 +8753,7 @@
                       <p:cNvPr id="5" name="对象 4" hidden="1">
                         <a:extLst>
                           <a:ext uri="{FF2B5EF4-FFF2-40B4-BE49-F238E27FC236}">
-                            <a16:creationId xmlns:a16="http://schemas.microsoft.com/office/drawing/2014/main" id="{F6D6C291-5179-D1C6-51F3-2F0EC23B3FBF}"/>
+                            <a16:creationId xmlns:a16="http://schemas.microsoft.com/office/drawing/2014/main" id="{130CC9A2-7963-7CDB-76CE-405030ABE480}"/>
                           </a:ext>
                         </a:extLst>
                       </p:cNvPr>
@@ -6342,7 +8787,7 @@
           <p:cNvPr id="2" name="标题 1">
             <a:extLst>
               <a:ext uri="{FF2B5EF4-FFF2-40B4-BE49-F238E27FC236}">
-                <a16:creationId xmlns:a16="http://schemas.microsoft.com/office/drawing/2014/main" id="{11D8C07E-A3BD-C6DA-26FE-3FF2DB122CD6}"/>
+                <a16:creationId xmlns:a16="http://schemas.microsoft.com/office/drawing/2014/main" id="{A37FA33F-196E-6436-E674-FF02C5BD8B48}"/>
               </a:ext>
             </a:extLst>
           </p:cNvPr>
@@ -6377,15 +8822,7 @@
             </a:r>
             <a:r>
               <a:rPr lang="zh-CN" altLang="en-US" dirty="0"/>
-              <a:t>厂商</a:t>
-            </a:r>
-            <a:r>
-              <a:rPr lang="en-US" altLang="zh-CN" dirty="0"/>
-              <a:t>&amp;</a:t>
-            </a:r>
-            <a:r>
-              <a:rPr lang="zh-CN" altLang="en-US" dirty="0"/>
-              <a:t>投融资动态</a:t>
+              <a:t>模型应用动态</a:t>
             </a:r>
           </a:p>
         </p:txBody>
@@ -6395,7 +8832,7 @@
           <p:cNvPr id="3" name="文本占位符 2">
             <a:extLst>
               <a:ext uri="{FF2B5EF4-FFF2-40B4-BE49-F238E27FC236}">
-                <a16:creationId xmlns:a16="http://schemas.microsoft.com/office/drawing/2014/main" id="{98491B4B-A37B-9B21-B6E6-69800FF58E2C}"/>
+                <a16:creationId xmlns:a16="http://schemas.microsoft.com/office/drawing/2014/main" id="{5B5A0AC3-CCA2-A976-A015-C00A9452D4B4}"/>
               </a:ext>
             </a:extLst>
           </p:cNvPr>
@@ -6420,7 +8857,7 @@
           <p:cNvPr id="4" name="文本占位符 3">
             <a:extLst>
               <a:ext uri="{FF2B5EF4-FFF2-40B4-BE49-F238E27FC236}">
-                <a16:creationId xmlns:a16="http://schemas.microsoft.com/office/drawing/2014/main" id="{88F93859-38DA-64AF-E13D-30A7A6CC47E7}"/>
+                <a16:creationId xmlns:a16="http://schemas.microsoft.com/office/drawing/2014/main" id="{82669AF7-0E32-FE60-51EE-BBB336D7B300}"/>
               </a:ext>
             </a:extLst>
           </p:cNvPr>
@@ -6442,10 +8879,10 @@
       </p:sp>
       <p:sp>
         <p:nvSpPr>
-          <p:cNvPr id="12" name="矩形 11">
-            <a:extLst>
-              <a:ext uri="{FF2B5EF4-FFF2-40B4-BE49-F238E27FC236}">
-                <a16:creationId xmlns:a16="http://schemas.microsoft.com/office/drawing/2014/main" id="{4580790C-D227-417A-B10F-738EAA74EFFE}"/>
+          <p:cNvPr id="20" name="矩形 19">
+            <a:extLst>
+              <a:ext uri="{FF2B5EF4-FFF2-40B4-BE49-F238E27FC236}">
+                <a16:creationId xmlns:a16="http://schemas.microsoft.com/office/drawing/2014/main" id="{2F514736-476B-321E-B205-D7ED0A88F458}"/>
               </a:ext>
             </a:extLst>
           </p:cNvPr>
@@ -6454,110 +8891,7 @@
         </p:nvSpPr>
         <p:spPr>
           <a:xfrm>
-            <a:off x="547300" y="3793422"/>
-            <a:ext cx="8250192" cy="2453584"/>
-          </a:xfrm>
-          <a:prstGeom prst="rect">
-            <a:avLst/>
-          </a:prstGeom>
-          <a:solidFill>
-            <a:schemeClr val="bg1">
-              <a:lumMod val="95000"/>
-            </a:schemeClr>
-          </a:solidFill>
-          <a:ln>
-            <a:noFill/>
-          </a:ln>
-        </p:spPr>
-        <p:style>
-          <a:lnRef idx="2">
-            <a:schemeClr val="accent1">
-              <a:shade val="50000"/>
-            </a:schemeClr>
-          </a:lnRef>
-          <a:fillRef idx="1">
-            <a:schemeClr val="accent1"/>
-          </a:fillRef>
-          <a:effectRef idx="0">
-            <a:schemeClr val="accent1"/>
-          </a:effectRef>
-          <a:fontRef idx="minor">
-            <a:schemeClr val="lt1"/>
-          </a:fontRef>
-        </p:style>
-        <p:txBody>
-          <a:bodyPr rtlCol="0" anchor="ctr"/>
-          <a:lstStyle/>
-          <a:p>
-            <a:pPr marL="285750" indent="-285750">
-              <a:buFont typeface="Arial" panose="020B0604020202020204" pitchFamily="34" charset="0"/>
-              <a:buChar char="•"/>
-            </a:pPr>
-            <a:r>
-              <a:rPr kumimoji="1" lang="zh-CN" altLang="en-US" sz="1400" b="1" dirty="0">
-                <a:solidFill>
-                  <a:prstClr val="black"/>
-                </a:solidFill>
-                <a:latin typeface="华文楷体" panose="02010600040101010101" pitchFamily="2" charset="-122"/>
-                <a:ea typeface="华文楷体" panose="02010600040101010101" pitchFamily="2" charset="-122"/>
-              </a:rPr>
-              <a:t>新闻</a:t>
-            </a:r>
-            <a:r>
-              <a:rPr kumimoji="1" lang="zh-CN" altLang="en" sz="1400" b="1" dirty="0">
-                <a:solidFill>
-                  <a:prstClr val="black"/>
-                </a:solidFill>
-                <a:latin typeface="华文楷体" panose="02010600040101010101" pitchFamily="2" charset="-122"/>
-                <a:ea typeface="华文楷体" panose="02010600040101010101" pitchFamily="2" charset="-122"/>
-              </a:rPr>
-              <a:t>：</a:t>
-            </a:r>
-            <a:r>
-              <a:rPr kumimoji="1" lang="zh-CN" altLang="en-US" sz="1400" dirty="0">
-                <a:solidFill>
-                  <a:prstClr val="black"/>
-                </a:solidFill>
-                <a:latin typeface="华文楷体" panose="02010600040101010101" pitchFamily="2" charset="-122"/>
-                <a:ea typeface="华文楷体" panose="02010600040101010101" pitchFamily="2" charset="-122"/>
-              </a:rPr>
-              <a:t>正文</a:t>
-            </a:r>
-            <a:endParaRPr lang="zh-CN" altLang="en-US" sz="1400" dirty="0"/>
-          </a:p>
-          <a:p>
-            <a:pPr algn="l">
-              <a:lnSpc>
-                <a:spcPct val="130000"/>
-              </a:lnSpc>
-              <a:spcBef>
-                <a:spcPts val="0"/>
-              </a:spcBef>
-              <a:spcAft>
-                <a:spcPts val="0"/>
-              </a:spcAft>
-            </a:pPr>
-            <a:endParaRPr lang="zh-CN" altLang="en-US" sz="1400" dirty="0">
-              <a:effectLst/>
-            </a:endParaRPr>
-          </a:p>
-        </p:txBody>
-      </p:sp>
-      <p:sp>
-        <p:nvSpPr>
-          <p:cNvPr id="20" name="矩形 19">
-            <a:extLst>
-              <a:ext uri="{FF2B5EF4-FFF2-40B4-BE49-F238E27FC236}">
-                <a16:creationId xmlns:a16="http://schemas.microsoft.com/office/drawing/2014/main" id="{DB9AD8D5-9456-E566-6A22-CDF38AD8393A}"/>
-              </a:ext>
-            </a:extLst>
-          </p:cNvPr>
-          <p:cNvSpPr/>
-          <p:nvPr/>
-        </p:nvSpPr>
-        <p:spPr>
-          <a:xfrm>
-            <a:off x="547300" y="1017577"/>
+            <a:off x="567178" y="1961794"/>
             <a:ext cx="8250192" cy="2569691"/>
           </a:xfrm>
           <a:prstGeom prst="rect">
@@ -6638,240 +8972,26 @@
           </a:p>
         </p:txBody>
       </p:sp>
-    </p:spTree>
-    <p:extLst>
-      <p:ext uri="{BB962C8B-B14F-4D97-AF65-F5344CB8AC3E}">
-        <p14:creationId xmlns:p14="http://schemas.microsoft.com/office/powerpoint/2010/main" val="1426254220"/>
-      </p:ext>
-    </p:extLst>
-  </p:cSld>
-  <p:clrMapOvr>
-    <a:masterClrMapping/>
-  </p:clrMapOvr>
-</p:sld>
-</file>
-
-<file path=ppt/slides/slide9.xml><?xml version="1.0" encoding="utf-8"?>
-<p:sld xmlns:a="http://schemas.openxmlformats.org/drawingml/2006/main" xmlns:r="http://schemas.openxmlformats.org/officeDocument/2006/relationships" xmlns:p="http://schemas.openxmlformats.org/presentationml/2006/main">
-  <p:cSld>
-    <p:spTree>
-      <p:nvGrpSpPr>
-        <p:cNvPr id="1" name="">
-          <a:extLst>
-            <a:ext uri="{FF2B5EF4-FFF2-40B4-BE49-F238E27FC236}">
-              <a16:creationId xmlns:a16="http://schemas.microsoft.com/office/drawing/2014/main" id="{9D458671-E763-115B-C46E-82986CC11E7D}"/>
-            </a:ext>
-          </a:extLst>
-        </p:cNvPr>
-        <p:cNvGrpSpPr/>
-        <p:nvPr/>
-      </p:nvGrpSpPr>
-      <p:grpSpPr>
-        <a:xfrm>
-          <a:off x="0" y="0"/>
-          <a:ext cx="0" cy="0"/>
-          <a:chOff x="0" y="0"/>
-          <a:chExt cx="0" cy="0"/>
-        </a:xfrm>
-      </p:grpSpPr>
-      <p:graphicFrame>
-        <p:nvGraphicFramePr>
-          <p:cNvPr id="5" name="对象 4" hidden="1">
-            <a:extLst>
-              <a:ext uri="{FF2B5EF4-FFF2-40B4-BE49-F238E27FC236}">
-                <a16:creationId xmlns:a16="http://schemas.microsoft.com/office/drawing/2014/main" id="{B56D40AC-6D58-0523-445B-E1B027761AC4}"/>
-              </a:ext>
-            </a:extLst>
-          </p:cNvPr>
-          <p:cNvGraphicFramePr>
-            <a:graphicFrameLocks noChangeAspect="1"/>
-          </p:cNvGraphicFramePr>
-          <p:nvPr>
-            <p:custDataLst>
-              <p:tags r:id="rId1"/>
-            </p:custDataLst>
-          </p:nvPr>
-        </p:nvGraphicFramePr>
-        <p:xfrm>
-          <a:off x="1588" y="1588"/>
-          <a:ext cx="1588" cy="1588"/>
-        </p:xfrm>
-        <a:graphic>
-          <a:graphicData uri="http://schemas.openxmlformats.org/presentationml/2006/ole">
-            <mc:AlternateContent xmlns:mc="http://schemas.openxmlformats.org/markup-compatibility/2006">
-              <mc:Choice xmlns:v="urn:schemas-microsoft-com:vml" Requires="v">
-                <p:oleObj name="think-cell 幻灯片" r:id="rId3" imgW="425" imgH="426" progId="TCLayout.ActiveDocument.1">
-                  <p:embed/>
-                </p:oleObj>
-              </mc:Choice>
-              <mc:Fallback>
-                <p:oleObj name="think-cell 幻灯片" r:id="rId3" imgW="425" imgH="426" progId="TCLayout.ActiveDocument.1">
-                  <p:embed/>
-                  <p:pic>
-                    <p:nvPicPr>
-                      <p:cNvPr id="5" name="对象 4" hidden="1">
-                        <a:extLst>
-                          <a:ext uri="{FF2B5EF4-FFF2-40B4-BE49-F238E27FC236}">
-                            <a16:creationId xmlns:a16="http://schemas.microsoft.com/office/drawing/2014/main" id="{8234209E-E7C6-79CC-CE17-26B6D9A95CAE}"/>
-                          </a:ext>
-                        </a:extLst>
-                      </p:cNvPr>
-                      <p:cNvPicPr/>
-                      <p:nvPr/>
-                    </p:nvPicPr>
-                    <p:blipFill>
-                      <a:blip r:embed="rId4"/>
-                      <a:stretch>
-                        <a:fillRect/>
-                      </a:stretch>
-                    </p:blipFill>
-                    <p:spPr>
-                      <a:xfrm>
-                        <a:off x="1588" y="1588"/>
-                        <a:ext cx="1588" cy="1588"/>
-                      </a:xfrm>
-                      <a:prstGeom prst="rect">
-                        <a:avLst/>
-                      </a:prstGeom>
-                    </p:spPr>
-                  </p:pic>
-                </p:oleObj>
-              </mc:Fallback>
-            </mc:AlternateContent>
-          </a:graphicData>
-        </a:graphic>
-      </p:graphicFrame>
-      <p:sp>
-        <p:nvSpPr>
-          <p:cNvPr id="2" name="标题 1">
-            <a:extLst>
-              <a:ext uri="{FF2B5EF4-FFF2-40B4-BE49-F238E27FC236}">
-                <a16:creationId xmlns:a16="http://schemas.microsoft.com/office/drawing/2014/main" id="{FDBDD6D3-B4E3-9677-A51C-372E24C8595C}"/>
-              </a:ext>
-            </a:extLst>
-          </p:cNvPr>
-          <p:cNvSpPr>
-            <a:spLocks noGrp="1"/>
-          </p:cNvSpPr>
-          <p:nvPr>
-            <p:ph type="title"/>
-          </p:nvPr>
+      <p:sp>
+        <p:nvSpPr>
+          <p:cNvPr id="6" name="矩形 5">
+            <a:extLst>
+              <a:ext uri="{FF2B5EF4-FFF2-40B4-BE49-F238E27FC236}">
+                <a16:creationId xmlns:a16="http://schemas.microsoft.com/office/drawing/2014/main" id="{722612C0-8D02-25A1-26E0-B346B2585C7F}"/>
+              </a:ext>
+            </a:extLst>
+          </p:cNvPr>
+          <p:cNvSpPr/>
+          <p:nvPr/>
         </p:nvSpPr>
         <p:spPr>
           <a:xfrm>
-            <a:off x="378371" y="237181"/>
-            <a:ext cx="11254155" cy="463846"/>
-          </a:xfrm>
-        </p:spPr>
-        <p:txBody>
-          <a:bodyPr vert="horz"/>
-          <a:lstStyle/>
-          <a:p>
-            <a:r>
-              <a:rPr lang="en-US" altLang="zh-CN" dirty="0"/>
-              <a:t>【</a:t>
-            </a:r>
-            <a:r>
-              <a:rPr lang="zh-CN" altLang="en-US" dirty="0"/>
-              <a:t>本周关注</a:t>
-            </a:r>
-            <a:r>
-              <a:rPr lang="en-US" altLang="zh-CN" dirty="0"/>
-              <a:t>】</a:t>
-            </a:r>
-            <a:r>
-              <a:rPr lang="zh-CN" altLang="en-US" dirty="0"/>
-              <a:t>厂商</a:t>
-            </a:r>
-            <a:r>
-              <a:rPr lang="en-US" altLang="zh-CN" dirty="0"/>
-              <a:t>&amp;</a:t>
-            </a:r>
-            <a:r>
-              <a:rPr lang="zh-CN" altLang="en-US" dirty="0"/>
-              <a:t>投融资动态</a:t>
-            </a:r>
-          </a:p>
-        </p:txBody>
-      </p:sp>
-      <p:sp>
-        <p:nvSpPr>
-          <p:cNvPr id="3" name="文本占位符 2">
-            <a:extLst>
-              <a:ext uri="{FF2B5EF4-FFF2-40B4-BE49-F238E27FC236}">
-                <a16:creationId xmlns:a16="http://schemas.microsoft.com/office/drawing/2014/main" id="{5BE0C64C-B8CD-16AF-0C9E-7B2BD9DDD416}"/>
-              </a:ext>
-            </a:extLst>
-          </p:cNvPr>
-          <p:cNvSpPr>
-            <a:spLocks noGrp="1"/>
-          </p:cNvSpPr>
-          <p:nvPr>
-            <p:ph type="body" sz="quarter" idx="10"/>
-          </p:nvPr>
-        </p:nvSpPr>
-        <p:spPr/>
-        <p:txBody>
-          <a:bodyPr/>
-          <a:lstStyle/>
-          <a:p>
-            <a:endParaRPr lang="zh-CN" altLang="en-US" dirty="0"/>
-          </a:p>
-        </p:txBody>
-      </p:sp>
-      <p:sp>
-        <p:nvSpPr>
-          <p:cNvPr id="4" name="文本占位符 3">
-            <a:extLst>
-              <a:ext uri="{FF2B5EF4-FFF2-40B4-BE49-F238E27FC236}">
-                <a16:creationId xmlns:a16="http://schemas.microsoft.com/office/drawing/2014/main" id="{BB8D29E4-1373-DDC9-1B8A-21E4BEA089E1}"/>
-              </a:ext>
-            </a:extLst>
-          </p:cNvPr>
-          <p:cNvSpPr>
-            <a:spLocks noGrp="1"/>
-          </p:cNvSpPr>
-          <p:nvPr>
-            <p:ph type="body" sz="quarter" idx="11"/>
-          </p:nvPr>
-        </p:nvSpPr>
-        <p:spPr/>
-        <p:txBody>
-          <a:bodyPr/>
-          <a:lstStyle/>
-          <a:p>
-            <a:endParaRPr lang="zh-CN" altLang="en-US" dirty="0"/>
-          </a:p>
-        </p:txBody>
-      </p:sp>
-      <p:sp>
-        <p:nvSpPr>
-          <p:cNvPr id="12" name="矩形 11">
-            <a:extLst>
-              <a:ext uri="{FF2B5EF4-FFF2-40B4-BE49-F238E27FC236}">
-                <a16:creationId xmlns:a16="http://schemas.microsoft.com/office/drawing/2014/main" id="{35A6BA6E-BDAD-F27A-076B-244EC5F73ECA}"/>
-              </a:ext>
-            </a:extLst>
-          </p:cNvPr>
-          <p:cNvSpPr/>
-          <p:nvPr/>
-        </p:nvSpPr>
-        <p:spPr>
-          <a:xfrm>
-            <a:off x="547300" y="3793422"/>
-            <a:ext cx="8250192" cy="2453584"/>
+            <a:off x="9044609" y="1961794"/>
+            <a:ext cx="2703443" cy="2569691"/>
           </a:xfrm>
           <a:prstGeom prst="rect">
             <a:avLst/>
           </a:prstGeom>
-          <a:solidFill>
-            <a:schemeClr val="bg1">
-              <a:lumMod val="95000"/>
-            </a:schemeClr>
-          </a:solidFill>
-          <a:ln>
-            <a:noFill/>
-          </a:ln>
         </p:spPr>
         <p:style>
           <a:lnRef idx="2">
@@ -6893,151 +9013,13 @@
           <a:bodyPr rtlCol="0" anchor="ctr"/>
           <a:lstStyle/>
           <a:p>
-            <a:pPr marL="285750" indent="-285750">
-              <a:buFont typeface="Arial" panose="020B0604020202020204" pitchFamily="34" charset="0"/>
-              <a:buChar char="•"/>
-            </a:pPr>
-            <a:r>
-              <a:rPr kumimoji="1" lang="zh-CN" altLang="en-US" sz="1400" b="1" dirty="0">
-                <a:solidFill>
-                  <a:prstClr val="black"/>
-                </a:solidFill>
+            <a:pPr algn="ctr"/>
+            <a:r>
+              <a:rPr kumimoji="1" lang="zh-CN" altLang="en-US" sz="1400" dirty="0">
                 <a:latin typeface="华文楷体" panose="02010600040101010101" pitchFamily="2" charset="-122"/>
                 <a:ea typeface="华文楷体" panose="02010600040101010101" pitchFamily="2" charset="-122"/>
               </a:rPr>
-              <a:t>新闻</a:t>
-            </a:r>
-            <a:r>
-              <a:rPr kumimoji="1" lang="zh-CN" altLang="en" sz="1400" b="1" dirty="0">
-                <a:solidFill>
-                  <a:prstClr val="black"/>
-                </a:solidFill>
-                <a:latin typeface="华文楷体" panose="02010600040101010101" pitchFamily="2" charset="-122"/>
-                <a:ea typeface="华文楷体" panose="02010600040101010101" pitchFamily="2" charset="-122"/>
-              </a:rPr>
-              <a:t>：</a:t>
-            </a:r>
-            <a:r>
-              <a:rPr kumimoji="1" lang="zh-CN" altLang="en-US" sz="1400" dirty="0">
-                <a:solidFill>
-                  <a:prstClr val="black"/>
-                </a:solidFill>
-                <a:latin typeface="华文楷体" panose="02010600040101010101" pitchFamily="2" charset="-122"/>
-                <a:ea typeface="华文楷体" panose="02010600040101010101" pitchFamily="2" charset="-122"/>
-              </a:rPr>
-              <a:t>正文</a:t>
-            </a:r>
-            <a:endParaRPr lang="zh-CN" altLang="en-US" sz="1400" dirty="0"/>
-          </a:p>
-          <a:p>
-            <a:pPr algn="l">
-              <a:lnSpc>
-                <a:spcPct val="130000"/>
-              </a:lnSpc>
-              <a:spcBef>
-                <a:spcPts val="0"/>
-              </a:spcBef>
-              <a:spcAft>
-                <a:spcPts val="0"/>
-              </a:spcAft>
-            </a:pPr>
-            <a:endParaRPr lang="zh-CN" altLang="en-US" sz="1400" dirty="0">
-              <a:effectLst/>
-            </a:endParaRPr>
-          </a:p>
-        </p:txBody>
-      </p:sp>
-      <p:sp>
-        <p:nvSpPr>
-          <p:cNvPr id="20" name="矩形 19">
-            <a:extLst>
-              <a:ext uri="{FF2B5EF4-FFF2-40B4-BE49-F238E27FC236}">
-                <a16:creationId xmlns:a16="http://schemas.microsoft.com/office/drawing/2014/main" id="{2D89FBA6-BC2B-8918-7700-AC83EE18730F}"/>
-              </a:ext>
-            </a:extLst>
-          </p:cNvPr>
-          <p:cNvSpPr/>
-          <p:nvPr/>
-        </p:nvSpPr>
-        <p:spPr>
-          <a:xfrm>
-            <a:off x="547300" y="1017577"/>
-            <a:ext cx="8250192" cy="2569691"/>
-          </a:xfrm>
-          <a:prstGeom prst="rect">
-            <a:avLst/>
-          </a:prstGeom>
-          <a:solidFill>
-            <a:schemeClr val="bg1">
-              <a:lumMod val="95000"/>
-            </a:schemeClr>
-          </a:solidFill>
-          <a:ln>
-            <a:noFill/>
-          </a:ln>
-        </p:spPr>
-        <p:style>
-          <a:lnRef idx="2">
-            <a:schemeClr val="accent1">
-              <a:shade val="50000"/>
-            </a:schemeClr>
-          </a:lnRef>
-          <a:fillRef idx="1">
-            <a:schemeClr val="accent1"/>
-          </a:fillRef>
-          <a:effectRef idx="0">
-            <a:schemeClr val="accent1"/>
-          </a:effectRef>
-          <a:fontRef idx="minor">
-            <a:schemeClr val="lt1"/>
-          </a:fontRef>
-        </p:style>
-        <p:txBody>
-          <a:bodyPr rtlCol="0" anchor="ctr"/>
-          <a:lstStyle/>
-          <a:p>
-            <a:pPr marL="285750" indent="-285750" algn="l">
-              <a:lnSpc>
-                <a:spcPct val="130000"/>
-              </a:lnSpc>
-              <a:spcBef>
-                <a:spcPts val="0"/>
-              </a:spcBef>
-              <a:spcAft>
-                <a:spcPts val="0"/>
-              </a:spcAft>
-              <a:buFont typeface="Arial" panose="020B0604020202020204" pitchFamily="34" charset="0"/>
-              <a:buChar char="•"/>
-            </a:pPr>
-            <a:r>
-              <a:rPr kumimoji="1" lang="zh-CN" altLang="en-US" sz="1400" b="1" dirty="0">
-                <a:solidFill>
-                  <a:prstClr val="black"/>
-                </a:solidFill>
-                <a:latin typeface="华文楷体" panose="02010600040101010101" pitchFamily="2" charset="-122"/>
-                <a:ea typeface="华文楷体" panose="02010600040101010101" pitchFamily="2" charset="-122"/>
-              </a:rPr>
-              <a:t>新闻</a:t>
-            </a:r>
-            <a:r>
-              <a:rPr kumimoji="1" lang="zh-CN" altLang="en" sz="1400" b="1" dirty="0">
-                <a:solidFill>
-                  <a:prstClr val="black"/>
-                </a:solidFill>
-                <a:latin typeface="华文楷体" panose="02010600040101010101" pitchFamily="2" charset="-122"/>
-                <a:ea typeface="华文楷体" panose="02010600040101010101" pitchFamily="2" charset="-122"/>
-              </a:rPr>
-              <a:t>：</a:t>
-            </a:r>
-            <a:r>
-              <a:rPr kumimoji="1" lang="zh-CN" altLang="en-US" sz="1400" dirty="0">
-                <a:solidFill>
-                  <a:prstClr val="black"/>
-                </a:solidFill>
-                <a:latin typeface="华文楷体" panose="02010600040101010101" pitchFamily="2" charset="-122"/>
-                <a:ea typeface="华文楷体" panose="02010600040101010101" pitchFamily="2" charset="-122"/>
-              </a:rPr>
-              <a:t>正文</a:t>
+              <a:t>图片占位符</a:t>
             </a:r>
           </a:p>
         </p:txBody>
@@ -7045,7 +9027,7 @@
     </p:spTree>
     <p:extLst>
       <p:ext uri="{BB962C8B-B14F-4D97-AF65-F5344CB8AC3E}">
-        <p14:creationId xmlns:p14="http://schemas.microsoft.com/office/powerpoint/2010/main" val="2217065166"/>
+        <p14:creationId xmlns:p14="http://schemas.microsoft.com/office/powerpoint/2010/main" val="422047294"/>
       </p:ext>
     </p:extLst>
   </p:cSld>
@@ -7109,7 +9091,25 @@
 </p:tagLst>
 </file>
 
+<file path=ppt/tags/tag18.xml><?xml version="1.0" encoding="utf-8"?>
+<p:tagLst xmlns:a="http://schemas.openxmlformats.org/drawingml/2006/main" xmlns:r="http://schemas.openxmlformats.org/officeDocument/2006/relationships" xmlns:p="http://schemas.openxmlformats.org/presentationml/2006/main">
+  <p:tag name="THINKCELLSHAPEDONOTDELETE" val="thinkcellActiveDocDoNotDelete"/>
+</p:tagLst>
+</file>
+
+<file path=ppt/tags/tag19.xml><?xml version="1.0" encoding="utf-8"?>
+<p:tagLst xmlns:a="http://schemas.openxmlformats.org/drawingml/2006/main" xmlns:r="http://schemas.openxmlformats.org/officeDocument/2006/relationships" xmlns:p="http://schemas.openxmlformats.org/presentationml/2006/main">
+  <p:tag name="THINKCELLSHAPEDONOTDELETE" val="thinkcellActiveDocDoNotDelete"/>
+</p:tagLst>
+</file>
+
 <file path=ppt/tags/tag2.xml><?xml version="1.0" encoding="utf-8"?>
+<p:tagLst xmlns:a="http://schemas.openxmlformats.org/drawingml/2006/main" xmlns:r="http://schemas.openxmlformats.org/officeDocument/2006/relationships" xmlns:p="http://schemas.openxmlformats.org/presentationml/2006/main">
+  <p:tag name="THINKCELLSHAPEDONOTDELETE" val="thinkcellActiveDocDoNotDelete"/>
+</p:tagLst>
+</file>
+
+<file path=ppt/tags/tag20.xml><?xml version="1.0" encoding="utf-8"?>
 <p:tagLst xmlns:a="http://schemas.openxmlformats.org/drawingml/2006/main" xmlns:r="http://schemas.openxmlformats.org/officeDocument/2006/relationships" xmlns:p="http://schemas.openxmlformats.org/presentationml/2006/main">
   <p:tag name="THINKCELLSHAPEDONOTDELETE" val="thinkcellActiveDocDoNotDelete"/>
 </p:tagLst>
